--- a/docs/Exoplanet_CV_Portfolio_FM.pptx
+++ b/docs/Exoplanet_CV_Portfolio_FM.pptx
@@ -11,6 +11,10 @@
     <p:sldId id="259" r:id="rId5"/>
     <p:sldId id="260" r:id="rId6"/>
     <p:sldId id="261" r:id="rId7"/>
+    <p:sldId id="264" r:id="rId15"/>
+    <p:sldId id="265" r:id="rId16"/>
+    <p:sldId id="266" r:id="rId17"/>
+    <p:sldId id="267" r:id="rId18"/>
     <p:sldId id="262" r:id="rId8"/>
     <p:sldId id="263" r:id="rId9"/>
   </p:sldIdLst>
@@ -551,6 +555,216 @@
 </p:notes>
 </file>
 
+<file path=ppt/notesSlides/notesSlide10.xml><?xml version="1.0" encoding="utf-8"?>
+<p:notes xmlns:a="http://schemas.openxmlformats.org/drawingml/2006/main" xmlns:p="http://schemas.openxmlformats.org/presentationml/2006/main" xmlns:r="http://schemas.openxmlformats.org/officeDocument/2006/relationships">
+  <p:cSld>
+    <p:spTree>
+      <p:nvGrpSpPr>
+        <p:cNvPr id="1" name=""/>
+        <p:cNvGrpSpPr/>
+        <p:nvPr/>
+      </p:nvGrpSpPr>
+      <p:grpSpPr>
+        <a:xfrm>
+          <a:off x="0" y="0"/>
+          <a:ext cx="0" cy="0"/>
+          <a:chOff x="0" y="0"/>
+          <a:chExt cx="0" cy="0"/>
+        </a:xfrm>
+      </p:grpSpPr>
+      <p:sp>
+        <p:nvSpPr>
+          <p:cNvPr id="2" name="Slide Image Placeholder 1"/>
+          <p:cNvSpPr>
+            <a:spLocks noGrp="1"/>
+          </p:cNvSpPr>
+          <p:nvPr>
+            <p:ph type="sldImg" idx="2"/>
+          </p:nvPr>
+        </p:nvSpPr>
+        <p:spPr/>
+      </p:sp>
+      <p:sp>
+        <p:nvSpPr>
+          <p:cNvPr id="3" name="Notes Placeholder 2"/>
+          <p:cNvSpPr>
+            <a:spLocks noGrp="1"/>
+          </p:cNvSpPr>
+          <p:nvPr>
+            <p:ph type="body" idx="3" sz="quarter"/>
+          </p:nvPr>
+        </p:nvSpPr>
+        <p:spPr/>
+        <p:txBody>
+          <a:bodyPr/>
+          <a:lstStyle/>
+          <a:p>
+            <a:r>
+              <a:t>Left: the Kepler field, one pixel per star, over the Gaia Milky Way. Right: Kepler-90, eight planets, with the live light-curve strip.</a:t>
+            </a:r>
+          </a:p>
+        </p:txBody>
+      </p:sp>
+      <p:sp>
+        <p:nvSpPr>
+          <p:cNvPr id="4" name="Slide Number Placeholder 3"/>
+          <p:cNvSpPr>
+            <a:spLocks noGrp="1"/>
+          </p:cNvSpPr>
+          <p:nvPr>
+            <p:ph type="sldNum" idx="5" sz="quarter"/>
+          </p:nvPr>
+        </p:nvSpPr>
+        <p:spPr/>
+      </p:sp>
+    </p:spTree>
+  </p:cSld>
+  <p:clrMapOvr>
+    <a:masterClrMapping/>
+  </p:clrMapOvr>
+</p:notes>
+</file>
+
+<file path=ppt/notesSlides/notesSlide11.xml><?xml version="1.0" encoding="utf-8"?>
+<p:notes xmlns:a="http://schemas.openxmlformats.org/drawingml/2006/main" xmlns:p="http://schemas.openxmlformats.org/presentationml/2006/main" xmlns:r="http://schemas.openxmlformats.org/officeDocument/2006/relationships">
+  <p:cSld>
+    <p:spTree>
+      <p:nvGrpSpPr>
+        <p:cNvPr id="1" name=""/>
+        <p:cNvGrpSpPr/>
+        <p:nvPr/>
+      </p:nvGrpSpPr>
+      <p:grpSpPr>
+        <a:xfrm>
+          <a:off x="0" y="0"/>
+          <a:ext cx="0" cy="0"/>
+          <a:chOff x="0" y="0"/>
+          <a:chExt cx="0" cy="0"/>
+        </a:xfrm>
+      </p:grpSpPr>
+      <p:sp>
+        <p:nvSpPr>
+          <p:cNvPr id="2" name="Slide Image Placeholder 1"/>
+          <p:cNvSpPr>
+            <a:spLocks noGrp="1"/>
+          </p:cNvSpPr>
+          <p:nvPr>
+            <p:ph type="sldImg" idx="2"/>
+          </p:nvPr>
+        </p:nvSpPr>
+        <p:spPr/>
+      </p:sp>
+      <p:sp>
+        <p:nvSpPr>
+          <p:cNvPr id="3" name="Notes Placeholder 2"/>
+          <p:cNvSpPr>
+            <a:spLocks noGrp="1"/>
+          </p:cNvSpPr>
+          <p:nvPr>
+            <p:ph type="body" idx="3" sz="quarter"/>
+          </p:nvPr>
+        </p:nvSpPr>
+        <p:spPr/>
+        <p:txBody>
+          <a:bodyPr/>
+          <a:lstStyle/>
+          <a:p>
+            <a:r>
+              <a:t>Interactive extras: zoom and true scale, the depth view, and easter eggs for the Solar System, spacecraft beyond Earth orbit, and the ISS.</a:t>
+            </a:r>
+          </a:p>
+        </p:txBody>
+      </p:sp>
+      <p:sp>
+        <p:nvSpPr>
+          <p:cNvPr id="4" name="Slide Number Placeholder 3"/>
+          <p:cNvSpPr>
+            <a:spLocks noGrp="1"/>
+          </p:cNvSpPr>
+          <p:nvPr>
+            <p:ph type="sldNum" idx="5" sz="quarter"/>
+          </p:nvPr>
+        </p:nvSpPr>
+        <p:spPr/>
+      </p:sp>
+    </p:spTree>
+  </p:cSld>
+  <p:clrMapOvr>
+    <a:masterClrMapping/>
+  </p:clrMapOvr>
+</p:notes>
+</file>
+
+<file path=ppt/notesSlides/notesSlide12.xml><?xml version="1.0" encoding="utf-8"?>
+<p:notes xmlns:a="http://schemas.openxmlformats.org/drawingml/2006/main" xmlns:p="http://schemas.openxmlformats.org/presentationml/2006/main" xmlns:r="http://schemas.openxmlformats.org/officeDocument/2006/relationships">
+  <p:cSld>
+    <p:spTree>
+      <p:nvGrpSpPr>
+        <p:cNvPr id="1" name=""/>
+        <p:cNvGrpSpPr/>
+        <p:nvPr/>
+      </p:nvGrpSpPr>
+      <p:grpSpPr>
+        <a:xfrm>
+          <a:off x="0" y="0"/>
+          <a:ext cx="0" cy="0"/>
+          <a:chOff x="0" y="0"/>
+          <a:chExt cx="0" cy="0"/>
+        </a:xfrm>
+      </p:grpSpPr>
+      <p:sp>
+        <p:nvSpPr>
+          <p:cNvPr id="2" name="Slide Image Placeholder 1"/>
+          <p:cNvSpPr>
+            <a:spLocks noGrp="1"/>
+          </p:cNvSpPr>
+          <p:nvPr>
+            <p:ph type="sldImg" idx="2"/>
+          </p:nvPr>
+        </p:nvSpPr>
+        <p:spPr/>
+      </p:sp>
+      <p:sp>
+        <p:nvSpPr>
+          <p:cNvPr id="3" name="Notes Placeholder 2"/>
+          <p:cNvSpPr>
+            <a:spLocks noGrp="1"/>
+          </p:cNvSpPr>
+          <p:nvPr>
+            <p:ph type="body" idx="3" sz="quarter"/>
+          </p:nvPr>
+        </p:nvSpPr>
+        <p:spPr/>
+        <p:txBody>
+          <a:bodyPr/>
+          <a:lstStyle/>
+          <a:p>
+            <a:r>
+              <a:t>Security and reliability work that keeps the project trustworthy.</a:t>
+            </a:r>
+          </a:p>
+        </p:txBody>
+      </p:sp>
+      <p:sp>
+        <p:nvSpPr>
+          <p:cNvPr id="4" name="Slide Number Placeholder 3"/>
+          <p:cNvSpPr>
+            <a:spLocks noGrp="1"/>
+          </p:cNvSpPr>
+          <p:nvPr>
+            <p:ph type="sldNum" idx="5" sz="quarter"/>
+          </p:nvPr>
+        </p:nvSpPr>
+        <p:spPr/>
+      </p:sp>
+    </p:spTree>
+  </p:cSld>
+  <p:clrMapOvr>
+    <a:masterClrMapping/>
+  </p:clrMapOvr>
+</p:notes>
+</file>
+
 <file path=ppt/notesSlides/notesSlide2.xml><?xml version="1.0" encoding="utf-8"?>
 <p:notes xmlns:a="http://schemas.openxmlformats.org/drawingml/2006/main" xmlns:r="http://schemas.openxmlformats.org/officeDocument/2006/relationships" xmlns:p="http://schemas.openxmlformats.org/presentationml/2006/main">
   <p:cSld>
@@ -1160,6 +1374,76 @@
         <p14:creationId xmlns:p14="http://schemas.microsoft.com/office/powerpoint/2010/main" val="1024086991"/>
       </p:ext>
     </p:extLst>
+  </p:cSld>
+  <p:clrMapOvr>
+    <a:masterClrMapping/>
+  </p:clrMapOvr>
+</p:notes>
+</file>
+
+<file path=ppt/notesSlides/notesSlide9.xml><?xml version="1.0" encoding="utf-8"?>
+<p:notes xmlns:a="http://schemas.openxmlformats.org/drawingml/2006/main" xmlns:p="http://schemas.openxmlformats.org/presentationml/2006/main" xmlns:r="http://schemas.openxmlformats.org/officeDocument/2006/relationships">
+  <p:cSld>
+    <p:spTree>
+      <p:nvGrpSpPr>
+        <p:cNvPr id="1" name=""/>
+        <p:cNvGrpSpPr/>
+        <p:nvPr/>
+      </p:nvGrpSpPr>
+      <p:grpSpPr>
+        <a:xfrm>
+          <a:off x="0" y="0"/>
+          <a:ext cx="0" cy="0"/>
+          <a:chOff x="0" y="0"/>
+          <a:chExt cx="0" cy="0"/>
+        </a:xfrm>
+      </p:grpSpPr>
+      <p:sp>
+        <p:nvSpPr>
+          <p:cNvPr id="2" name="Slide Image Placeholder 1"/>
+          <p:cNvSpPr>
+            <a:spLocks noGrp="1"/>
+          </p:cNvSpPr>
+          <p:nvPr>
+            <p:ph type="sldImg" idx="2"/>
+          </p:nvPr>
+        </p:nvSpPr>
+        <p:spPr/>
+      </p:sp>
+      <p:sp>
+        <p:nvSpPr>
+          <p:cNvPr id="3" name="Notes Placeholder 2"/>
+          <p:cNvSpPr>
+            <a:spLocks noGrp="1"/>
+          </p:cNvSpPr>
+          <p:nvPr>
+            <p:ph type="body" idx="3" sz="quarter"/>
+          </p:nvPr>
+        </p:nvSpPr>
+        <p:spPr/>
+        <p:txBody>
+          <a:bodyPr/>
+          <a:lstStyle/>
+          <a:p>
+            <a:r>
+              <a:t>V3 rebuilt the data and the model. Test numbers are on held-out stars that never appear in training; cross-validation confirms them across five different splits.</a:t>
+            </a:r>
+          </a:p>
+        </p:txBody>
+      </p:sp>
+      <p:sp>
+        <p:nvSpPr>
+          <p:cNvPr id="4" name="Slide Number Placeholder 3"/>
+          <p:cNvSpPr>
+            <a:spLocks noGrp="1"/>
+          </p:cNvSpPr>
+          <p:nvPr>
+            <p:ph type="sldNum" idx="5" sz="quarter"/>
+          </p:nvPr>
+        </p:nvSpPr>
+        <p:spPr/>
+      </p:sp>
+    </p:spTree>
   </p:cSld>
   <p:clrMapOvr>
     <a:masterClrMapping/>
@@ -3382,6 +3666,2760 @@
 </p:sld>
 </file>
 
+<file path=ppt/slides/slide10.xml><?xml version="1.0" encoding="utf-8"?>
+<p:sld xmlns:a="http://schemas.openxmlformats.org/drawingml/2006/main" xmlns:p="http://schemas.openxmlformats.org/presentationml/2006/main" xmlns:r="http://schemas.openxmlformats.org/officeDocument/2006/relationships">
+  <p:cSld>
+    <p:bg>
+      <p:bgPr>
+        <a:solidFill>
+          <a:srgbClr val="0B1120"/>
+        </a:solidFill>
+        <a:effectLst/>
+      </p:bgPr>
+    </p:bg>
+    <p:spTree>
+      <p:nvGrpSpPr>
+        <p:cNvPr id="1" name=""/>
+        <p:cNvGrpSpPr/>
+        <p:nvPr/>
+      </p:nvGrpSpPr>
+      <p:grpSpPr/>
+      <p:sp>
+        <p:nvSpPr>
+          <p:cNvPr id="2" name="Header band"/>
+          <p:cNvSpPr/>
+          <p:nvPr/>
+        </p:nvSpPr>
+        <p:spPr>
+          <a:xfrm>
+            <a:off x="0" y="0"/>
+            <a:ext cx="9144000" cy="1005840"/>
+          </a:xfrm>
+          <a:prstGeom prst="rect">
+            <a:avLst/>
+          </a:prstGeom>
+          <a:solidFill>
+            <a:srgbClr val="0F1E3C"/>
+          </a:solidFill>
+          <a:ln>
+            <a:noFill/>
+          </a:ln>
+          <a:effectLst/>
+        </p:spPr>
+        <p:style>
+          <a:lnRef idx="1">
+            <a:schemeClr val="accent1"/>
+          </a:lnRef>
+          <a:fillRef idx="3">
+            <a:schemeClr val="accent1"/>
+          </a:fillRef>
+          <a:effectRef idx="2">
+            <a:schemeClr val="accent1"/>
+          </a:effectRef>
+          <a:fontRef idx="minor">
+            <a:schemeClr val="lt1"/>
+          </a:fontRef>
+        </p:style>
+        <p:txBody>
+          <a:bodyPr rtlCol="0" anchor="ctr"/>
+          <a:lstStyle/>
+          <a:p>
+            <a:pPr algn="ctr"/>
+          </a:p>
+        </p:txBody>
+      </p:sp>
+      <p:sp>
+        <p:nvSpPr>
+          <p:cNvPr id="3" name="Title"/>
+          <p:cNvSpPr txBox="1"/>
+          <p:nvPr/>
+        </p:nvSpPr>
+        <p:spPr>
+          <a:xfrm>
+            <a:off x="457200" y="256032"/>
+            <a:ext cx="6583680" cy="548640"/>
+          </a:xfrm>
+          <a:prstGeom prst="rect">
+            <a:avLst/>
+          </a:prstGeom>
+          <a:noFill/>
+        </p:spPr>
+        <p:txBody>
+          <a:bodyPr wrap="square" lIns="0" rIns="0" tIns="0" bIns="0">
+            <a:spAutoFit/>
+          </a:bodyPr>
+          <a:lstStyle/>
+          <a:p>
+            <a:pPr algn="l"/>
+            <a:r>
+              <a:rPr sz="2800" b="1" i="0">
+                <a:solidFill>
+                  <a:srgbClr val="FFFFFF"/>
+                </a:solidFill>
+                <a:latin typeface="Calibri"/>
+              </a:rPr>
+              <a:t>The Kepler Star Map</a:t>
+            </a:r>
+          </a:p>
+        </p:txBody>
+      </p:sp>
+      <p:sp>
+        <p:nvSpPr>
+          <p:cNvPr id="4" name="Badge"/>
+          <p:cNvSpPr/>
+          <p:nvPr/>
+        </p:nvSpPr>
+        <p:spPr>
+          <a:xfrm>
+            <a:off x="7132320" y="228600"/>
+            <a:ext cx="1645920" cy="548640"/>
+          </a:xfrm>
+          <a:prstGeom prst="rect">
+            <a:avLst/>
+          </a:prstGeom>
+          <a:solidFill>
+            <a:srgbClr val="0F1E3C"/>
+          </a:solidFill>
+          <a:ln w="12700">
+            <a:solidFill>
+              <a:srgbClr val="F5C518"/>
+            </a:solidFill>
+          </a:ln>
+          <a:effectLst/>
+        </p:spPr>
+        <p:style>
+          <a:lnRef idx="1">
+            <a:schemeClr val="accent1"/>
+          </a:lnRef>
+          <a:fillRef idx="3">
+            <a:schemeClr val="accent1"/>
+          </a:fillRef>
+          <a:effectRef idx="2">
+            <a:schemeClr val="accent1"/>
+          </a:effectRef>
+          <a:fontRef idx="minor">
+            <a:schemeClr val="lt1"/>
+          </a:fontRef>
+        </p:style>
+        <p:txBody>
+          <a:bodyPr rtlCol="0" anchor="ctr"/>
+          <a:lstStyle/>
+          <a:p>
+            <a:pPr algn="ctr"/>
+          </a:p>
+        </p:txBody>
+      </p:sp>
+      <p:sp>
+        <p:nvSpPr>
+          <p:cNvPr id="5" name="TextBox 4"/>
+          <p:cNvSpPr txBox="1"/>
+          <p:nvPr/>
+        </p:nvSpPr>
+        <p:spPr>
+          <a:xfrm>
+            <a:off x="7132320" y="393192"/>
+            <a:ext cx="1645920" cy="274320"/>
+          </a:xfrm>
+          <a:prstGeom prst="rect">
+            <a:avLst/>
+          </a:prstGeom>
+          <a:noFill/>
+        </p:spPr>
+        <p:txBody>
+          <a:bodyPr wrap="square" lIns="0" rIns="0" tIns="0" bIns="0">
+            <a:spAutoFit/>
+          </a:bodyPr>
+          <a:lstStyle/>
+          <a:p>
+            <a:pPr algn="ctr"/>
+            <a:r>
+              <a:rPr sz="1000" b="1" i="0">
+                <a:solidFill>
+                  <a:srgbClr val="F5C518"/>
+                </a:solidFill>
+                <a:latin typeface="Calibri"/>
+              </a:rPr>
+              <a:t>LIVE  /  WEB</a:t>
+            </a:r>
+          </a:p>
+        </p:txBody>
+      </p:sp>
+      <p:pic>
+        <p:nvPicPr>
+          <p:cNvPr id="6" name="Map screenshot" descr="map.png"/>
+          <p:cNvPicPr>
+            <a:picLocks noChangeAspect="1"/>
+          </p:cNvPicPr>
+          <p:nvPr/>
+        </p:nvPicPr>
+        <p:blipFill>
+          <a:blip r:embed="rId2"/>
+          <a:stretch>
+            <a:fillRect/>
+          </a:stretch>
+        </p:blipFill>
+        <p:spPr>
+          <a:xfrm>
+            <a:off x="461018" y="1143000"/>
+            <a:ext cx="3238482" cy="3246119"/>
+          </a:xfrm>
+          <a:prstGeom prst="rect">
+            <a:avLst/>
+          </a:prstGeom>
+          <a:ln w="12700">
+            <a:solidFill>
+              <a:srgbClr val="2E4060"/>
+            </a:solidFill>
+          </a:ln>
+        </p:spPr>
+      </p:pic>
+      <p:pic>
+        <p:nvPicPr>
+          <p:cNvPr id="7" name="Kepler-90 screenshot" descr="sys90.png"/>
+          <p:cNvPicPr>
+            <a:picLocks noChangeAspect="1"/>
+          </p:cNvPicPr>
+          <p:nvPr/>
+        </p:nvPicPr>
+        <p:blipFill>
+          <a:blip r:embed="rId3"/>
+          <a:stretch>
+            <a:fillRect/>
+          </a:stretch>
+        </p:blipFill>
+        <p:spPr>
+          <a:xfrm>
+            <a:off x="4211306" y="1143000"/>
+            <a:ext cx="4378986" cy="2743200"/>
+          </a:xfrm>
+          <a:prstGeom prst="rect">
+            <a:avLst/>
+          </a:prstGeom>
+          <a:ln w="12700">
+            <a:solidFill>
+              <a:srgbClr val="2E4060"/>
+            </a:solidFill>
+          </a:ln>
+        </p:spPr>
+      </p:pic>
+      <p:sp>
+        <p:nvSpPr>
+          <p:cNvPr id="8" name="TextBox 7"/>
+          <p:cNvSpPr txBox="1"/>
+          <p:nvPr/>
+        </p:nvSpPr>
+        <p:spPr>
+          <a:xfrm>
+            <a:off x="4023360" y="3977639"/>
+            <a:ext cx="4754880" cy="457200"/>
+          </a:xfrm>
+          <a:prstGeom prst="rect">
+            <a:avLst/>
+          </a:prstGeom>
+          <a:noFill/>
+        </p:spPr>
+        <p:txBody>
+          <a:bodyPr wrap="square" lIns="0" rIns="0" tIns="0" bIns="0">
+            <a:spAutoFit/>
+          </a:bodyPr>
+          <a:lstStyle/>
+          <a:p>
+            <a:pPr algn="l"/>
+            <a:r>
+              <a:rPr sz="1100" b="0" i="0">
+                <a:solidFill>
+                  <a:srgbClr val="FFFFFF"/>
+                </a:solidFill>
+                <a:latin typeface="Calibri"/>
+              </a:rPr>
+              <a:t>Every one of 3,611 Kepler stars with a planet or candidate, </a:t>
+            </a:r>
+            <a:r>
+              <a:rPr sz="1100" b="1" i="0">
+                <a:solidFill>
+                  <a:srgbClr val="FFFFFF"/>
+                </a:solidFill>
+                <a:latin typeface="Calibri"/>
+              </a:rPr>
+              <a:t>drawn as pixel art from NASA and Gaia data</a:t>
+            </a:r>
+            <a:r>
+              <a:rPr sz="1100" b="0" i="0">
+                <a:solidFill>
+                  <a:srgbClr val="FFFFFF"/>
+                </a:solidFill>
+                <a:latin typeface="Calibri"/>
+              </a:rPr>
+              <a:t>. Search a system, watch its planets orbit and the light dip as they cross.</a:t>
+            </a:r>
+          </a:p>
+        </p:txBody>
+      </p:sp>
+      <p:sp>
+        <p:nvSpPr>
+          <p:cNvPr id="9" name="TextBox 8"/>
+          <p:cNvSpPr txBox="1"/>
+          <p:nvPr/>
+        </p:nvSpPr>
+        <p:spPr>
+          <a:xfrm>
+            <a:off x="365760" y="4526280"/>
+            <a:ext cx="8412480" cy="274320"/>
+          </a:xfrm>
+          <a:prstGeom prst="rect">
+            <a:avLst/>
+          </a:prstGeom>
+          <a:noFill/>
+        </p:spPr>
+        <p:txBody>
+          <a:bodyPr wrap="square" lIns="0" rIns="0" tIns="0" bIns="0">
+            <a:spAutoFit/>
+          </a:bodyPr>
+          <a:lstStyle/>
+          <a:p>
+            <a:pPr algn="l"/>
+            <a:r>
+              <a:rPr sz="1100" b="1" i="0">
+                <a:solidFill>
+                  <a:srgbClr val="F5C518"/>
+                </a:solidFill>
+                <a:latin typeface="Calibri"/>
+              </a:rPr>
+              <a:t>Live: </a:t>
+            </a:r>
+            <a:r>
+              <a:rPr sz="1100" b="0" i="0">
+                <a:solidFill>
+                  <a:srgbClr val="0AADA4"/>
+                </a:solidFill>
+                <a:latin typeface="Calibri"/>
+              </a:rPr>
+              <a:t>med27-coder.github.io/cv-project-kepler-exoplanet-detection-inventory</a:t>
+            </a:r>
+          </a:p>
+        </p:txBody>
+      </p:sp>
+      <p:sp>
+        <p:nvSpPr>
+          <p:cNvPr id="10" name="TextBox 9"/>
+          <p:cNvSpPr txBox="1"/>
+          <p:nvPr/>
+        </p:nvSpPr>
+        <p:spPr>
+          <a:xfrm>
+            <a:off x="365760" y="4800600"/>
+            <a:ext cx="8412480" cy="228600"/>
+          </a:xfrm>
+          <a:prstGeom prst="rect">
+            <a:avLst/>
+          </a:prstGeom>
+          <a:noFill/>
+        </p:spPr>
+        <p:txBody>
+          <a:bodyPr wrap="square" lIns="0" rIns="0" tIns="0" bIns="0">
+            <a:spAutoFit/>
+          </a:bodyPr>
+          <a:lstStyle/>
+          <a:p>
+            <a:pPr algn="l"/>
+            <a:r>
+              <a:rPr sz="900" b="0" i="0">
+                <a:solidFill>
+                  <a:srgbClr val="8CAABF"/>
+                </a:solidFill>
+                <a:latin typeface="Calibri"/>
+              </a:rPr>
+              <a:t>Behind the map: the real Milky Way (ESA Gaia DR3) and Kepler's 21 CCD modules. Free static site: no server, no tracking.</a:t>
+            </a:r>
+          </a:p>
+        </p:txBody>
+      </p:sp>
+    </p:spTree>
+  </p:cSld>
+  <p:clrMapOvr>
+    <a:masterClrMapping/>
+  </p:clrMapOvr>
+</p:sld>
+</file>
+
+<file path=ppt/slides/slide11.xml><?xml version="1.0" encoding="utf-8"?>
+<p:sld xmlns:a="http://schemas.openxmlformats.org/drawingml/2006/main" xmlns:p="http://schemas.openxmlformats.org/presentationml/2006/main" xmlns:r="http://schemas.openxmlformats.org/officeDocument/2006/relationships">
+  <p:cSld>
+    <p:bg>
+      <p:bgPr>
+        <a:solidFill>
+          <a:srgbClr val="0B1120"/>
+        </a:solidFill>
+        <a:effectLst/>
+      </p:bgPr>
+    </p:bg>
+    <p:spTree>
+      <p:nvGrpSpPr>
+        <p:cNvPr id="1" name=""/>
+        <p:cNvGrpSpPr/>
+        <p:nvPr/>
+      </p:nvGrpSpPr>
+      <p:grpSpPr/>
+      <p:sp>
+        <p:nvSpPr>
+          <p:cNvPr id="2" name="Header band"/>
+          <p:cNvSpPr/>
+          <p:nvPr/>
+        </p:nvSpPr>
+        <p:spPr>
+          <a:xfrm>
+            <a:off x="0" y="0"/>
+            <a:ext cx="9144000" cy="1005840"/>
+          </a:xfrm>
+          <a:prstGeom prst="rect">
+            <a:avLst/>
+          </a:prstGeom>
+          <a:solidFill>
+            <a:srgbClr val="0F1E3C"/>
+          </a:solidFill>
+          <a:ln>
+            <a:noFill/>
+          </a:ln>
+          <a:effectLst/>
+        </p:spPr>
+        <p:style>
+          <a:lnRef idx="1">
+            <a:schemeClr val="accent1"/>
+          </a:lnRef>
+          <a:fillRef idx="3">
+            <a:schemeClr val="accent1"/>
+          </a:fillRef>
+          <a:effectRef idx="2">
+            <a:schemeClr val="accent1"/>
+          </a:effectRef>
+          <a:fontRef idx="minor">
+            <a:schemeClr val="lt1"/>
+          </a:fontRef>
+        </p:style>
+        <p:txBody>
+          <a:bodyPr rtlCol="0" anchor="ctr"/>
+          <a:lstStyle/>
+          <a:p>
+            <a:pPr algn="ctr"/>
+          </a:p>
+        </p:txBody>
+      </p:sp>
+      <p:sp>
+        <p:nvSpPr>
+          <p:cNvPr id="3" name="Title"/>
+          <p:cNvSpPr txBox="1"/>
+          <p:nvPr/>
+        </p:nvSpPr>
+        <p:spPr>
+          <a:xfrm>
+            <a:off x="457200" y="256032"/>
+            <a:ext cx="6583680" cy="548640"/>
+          </a:xfrm>
+          <a:prstGeom prst="rect">
+            <a:avLst/>
+          </a:prstGeom>
+          <a:noFill/>
+        </p:spPr>
+        <p:txBody>
+          <a:bodyPr wrap="square" lIns="0" rIns="0" tIns="0" bIns="0">
+            <a:spAutoFit/>
+          </a:bodyPr>
+          <a:lstStyle/>
+          <a:p>
+            <a:pPr algn="l"/>
+            <a:r>
+              <a:rPr sz="2800" b="1" i="0">
+                <a:solidFill>
+                  <a:srgbClr val="FFFFFF"/>
+                </a:solidFill>
+                <a:latin typeface="Calibri"/>
+              </a:rPr>
+              <a:t>Explore the Field</a:t>
+            </a:r>
+          </a:p>
+        </p:txBody>
+      </p:sp>
+      <p:sp>
+        <p:nvSpPr>
+          <p:cNvPr id="4" name="Badge"/>
+          <p:cNvSpPr/>
+          <p:nvPr/>
+        </p:nvSpPr>
+        <p:spPr>
+          <a:xfrm>
+            <a:off x="7132320" y="228600"/>
+            <a:ext cx="1645920" cy="548640"/>
+          </a:xfrm>
+          <a:prstGeom prst="rect">
+            <a:avLst/>
+          </a:prstGeom>
+          <a:solidFill>
+            <a:srgbClr val="0F1E3C"/>
+          </a:solidFill>
+          <a:ln w="12700">
+            <a:solidFill>
+              <a:srgbClr val="F5C518"/>
+            </a:solidFill>
+          </a:ln>
+          <a:effectLst/>
+        </p:spPr>
+        <p:style>
+          <a:lnRef idx="1">
+            <a:schemeClr val="accent1"/>
+          </a:lnRef>
+          <a:fillRef idx="3">
+            <a:schemeClr val="accent1"/>
+          </a:fillRef>
+          <a:effectRef idx="2">
+            <a:schemeClr val="accent1"/>
+          </a:effectRef>
+          <a:fontRef idx="minor">
+            <a:schemeClr val="lt1"/>
+          </a:fontRef>
+        </p:style>
+        <p:txBody>
+          <a:bodyPr rtlCol="0" anchor="ctr"/>
+          <a:lstStyle/>
+          <a:p>
+            <a:pPr algn="ctr"/>
+          </a:p>
+        </p:txBody>
+      </p:sp>
+      <p:sp>
+        <p:nvSpPr>
+          <p:cNvPr id="5" name="TextBox 4"/>
+          <p:cNvSpPr txBox="1"/>
+          <p:nvPr/>
+        </p:nvSpPr>
+        <p:spPr>
+          <a:xfrm>
+            <a:off x="7132320" y="393192"/>
+            <a:ext cx="1645920" cy="274320"/>
+          </a:xfrm>
+          <a:prstGeom prst="rect">
+            <a:avLst/>
+          </a:prstGeom>
+          <a:noFill/>
+        </p:spPr>
+        <p:txBody>
+          <a:bodyPr wrap="square" lIns="0" rIns="0" tIns="0" bIns="0">
+            <a:spAutoFit/>
+          </a:bodyPr>
+          <a:lstStyle/>
+          <a:p>
+            <a:pPr algn="ctr"/>
+            <a:r>
+              <a:rPr sz="1000" b="1" i="0">
+                <a:solidFill>
+                  <a:srgbClr val="F5C518"/>
+                </a:solidFill>
+                <a:latin typeface="Calibri"/>
+              </a:rPr>
+              <a:t>EASTER EGGS</a:t>
+            </a:r>
+          </a:p>
+        </p:txBody>
+      </p:sp>
+      <p:pic>
+        <p:nvPicPr>
+          <p:cNvPr id="6" name="Kepler's view" descr="edge.png"/>
+          <p:cNvPicPr>
+            <a:picLocks noChangeAspect="1"/>
+          </p:cNvPicPr>
+          <p:nvPr/>
+        </p:nvPicPr>
+        <p:blipFill>
+          <a:blip r:embed="rId2"/>
+          <a:stretch>
+            <a:fillRect/>
+          </a:stretch>
+        </p:blipFill>
+        <p:spPr>
+          <a:xfrm>
+            <a:off x="729227" y="1143000"/>
+            <a:ext cx="1970544" cy="1234440"/>
+          </a:xfrm>
+          <a:prstGeom prst="rect">
+            <a:avLst/>
+          </a:prstGeom>
+          <a:ln w="12700">
+            <a:solidFill>
+              <a:srgbClr val="2E4060"/>
+            </a:solidFill>
+          </a:ln>
+        </p:spPr>
+      </p:pic>
+      <p:sp>
+        <p:nvSpPr>
+          <p:cNvPr id="7" name="TextBox 6"/>
+          <p:cNvSpPr txBox="1"/>
+          <p:nvPr/>
+        </p:nvSpPr>
+        <p:spPr>
+          <a:xfrm>
+            <a:off x="365760" y="2441448"/>
+            <a:ext cx="2697480" cy="201168"/>
+          </a:xfrm>
+          <a:prstGeom prst="rect">
+            <a:avLst/>
+          </a:prstGeom>
+          <a:noFill/>
+        </p:spPr>
+        <p:txBody>
+          <a:bodyPr wrap="square" lIns="0" rIns="0" tIns="0" bIns="0">
+            <a:spAutoFit/>
+          </a:bodyPr>
+          <a:lstStyle/>
+          <a:p>
+            <a:pPr algn="l"/>
+            <a:r>
+              <a:rPr sz="1100" b="1" i="0">
+                <a:solidFill>
+                  <a:srgbClr val="0AADA4"/>
+                </a:solidFill>
+                <a:latin typeface="Calibri"/>
+              </a:rPr>
+              <a:t>Kepler's view</a:t>
+            </a:r>
+          </a:p>
+        </p:txBody>
+      </p:sp>
+      <p:sp>
+        <p:nvSpPr>
+          <p:cNvPr id="8" name="TextBox 7"/>
+          <p:cNvSpPr txBox="1"/>
+          <p:nvPr/>
+        </p:nvSpPr>
+        <p:spPr>
+          <a:xfrm>
+            <a:off x="365760" y="2660904"/>
+            <a:ext cx="2697480" cy="329184"/>
+          </a:xfrm>
+          <a:prstGeom prst="rect">
+            <a:avLst/>
+          </a:prstGeom>
+          <a:noFill/>
+        </p:spPr>
+        <p:txBody>
+          <a:bodyPr wrap="square" lIns="0" rIns="0" tIns="0" bIns="0">
+            <a:spAutoFit/>
+          </a:bodyPr>
+          <a:lstStyle/>
+          <a:p>
+            <a:pPr algn="l"/>
+            <a:r>
+              <a:rPr sz="900" b="0" i="0">
+                <a:solidFill>
+                  <a:srgbClr val="8CAABF"/>
+                </a:solidFill>
+                <a:latin typeface="Calibri"/>
+              </a:rPr>
+              <a:t>Edge-on, as Kepler saw it: planets cross the star when the light dips</a:t>
+            </a:r>
+          </a:p>
+        </p:txBody>
+      </p:sp>
+      <p:pic>
+        <p:nvPicPr>
+          <p:cNvPr id="9" name="Unconfirmed candidates" descr="ghost.png"/>
+          <p:cNvPicPr>
+            <a:picLocks noChangeAspect="1"/>
+          </p:cNvPicPr>
+          <p:nvPr/>
+        </p:nvPicPr>
+        <p:blipFill>
+          <a:blip r:embed="rId3"/>
+          <a:stretch>
+            <a:fillRect/>
+          </a:stretch>
+        </p:blipFill>
+        <p:spPr>
+          <a:xfrm>
+            <a:off x="3563867" y="1143000"/>
+            <a:ext cx="1970544" cy="1234440"/>
+          </a:xfrm>
+          <a:prstGeom prst="rect">
+            <a:avLst/>
+          </a:prstGeom>
+          <a:ln w="12700">
+            <a:solidFill>
+              <a:srgbClr val="2E4060"/>
+            </a:solidFill>
+          </a:ln>
+        </p:spPr>
+      </p:pic>
+      <p:sp>
+        <p:nvSpPr>
+          <p:cNvPr id="10" name="TextBox 9"/>
+          <p:cNvSpPr txBox="1"/>
+          <p:nvPr/>
+        </p:nvSpPr>
+        <p:spPr>
+          <a:xfrm>
+            <a:off x="3200400" y="2441448"/>
+            <a:ext cx="2697480" cy="201168"/>
+          </a:xfrm>
+          <a:prstGeom prst="rect">
+            <a:avLst/>
+          </a:prstGeom>
+          <a:noFill/>
+        </p:spPr>
+        <p:txBody>
+          <a:bodyPr wrap="square" lIns="0" rIns="0" tIns="0" bIns="0">
+            <a:spAutoFit/>
+          </a:bodyPr>
+          <a:lstStyle/>
+          <a:p>
+            <a:pPr algn="l"/>
+            <a:r>
+              <a:rPr sz="1100" b="1" i="0">
+                <a:solidFill>
+                  <a:srgbClr val="0AADA4"/>
+                </a:solidFill>
+                <a:latin typeface="Calibri"/>
+              </a:rPr>
+              <a:t>Unconfirmed candidates</a:t>
+            </a:r>
+          </a:p>
+        </p:txBody>
+      </p:sp>
+      <p:sp>
+        <p:nvSpPr>
+          <p:cNvPr id="11" name="TextBox 10"/>
+          <p:cNvSpPr txBox="1"/>
+          <p:nvPr/>
+        </p:nvSpPr>
+        <p:spPr>
+          <a:xfrm>
+            <a:off x="3200400" y="2660904"/>
+            <a:ext cx="2697480" cy="329184"/>
+          </a:xfrm>
+          <a:prstGeom prst="rect">
+            <a:avLst/>
+          </a:prstGeom>
+          <a:noFill/>
+        </p:spPr>
+        <p:txBody>
+          <a:bodyPr wrap="square" lIns="0" rIns="0" tIns="0" bIns="0">
+            <a:spAutoFit/>
+          </a:bodyPr>
+          <a:lstStyle/>
+          <a:p>
+            <a:pPr algn="l"/>
+            <a:r>
+              <a:rPr sz="900" b="0" i="0">
+                <a:solidFill>
+                  <a:srgbClr val="8CAABF"/>
+                </a:solidFill>
+                <a:latin typeface="Calibri"/>
+              </a:rPr>
+              <a:t>Drawn as ghosts, with a case file for each candidate</a:t>
+            </a:r>
+          </a:p>
+        </p:txBody>
+      </p:sp>
+      <p:pic>
+        <p:nvPicPr>
+          <p:cNvPr id="12" name="Side view from Earth" descr="depth.png"/>
+          <p:cNvPicPr>
+            <a:picLocks noChangeAspect="1"/>
+          </p:cNvPicPr>
+          <p:nvPr/>
+        </p:nvPicPr>
+        <p:blipFill>
+          <a:blip r:embed="rId4"/>
+          <a:stretch>
+            <a:fillRect/>
+          </a:stretch>
+        </p:blipFill>
+        <p:spPr>
+          <a:xfrm>
+            <a:off x="6768012" y="1143000"/>
+            <a:ext cx="1231535" cy="1234440"/>
+          </a:xfrm>
+          <a:prstGeom prst="rect">
+            <a:avLst/>
+          </a:prstGeom>
+          <a:ln w="12700">
+            <a:solidFill>
+              <a:srgbClr val="2E4060"/>
+            </a:solidFill>
+          </a:ln>
+        </p:spPr>
+      </p:pic>
+      <p:sp>
+        <p:nvSpPr>
+          <p:cNvPr id="13" name="TextBox 12"/>
+          <p:cNvSpPr txBox="1"/>
+          <p:nvPr/>
+        </p:nvSpPr>
+        <p:spPr>
+          <a:xfrm>
+            <a:off x="6035040" y="2441448"/>
+            <a:ext cx="2697480" cy="201168"/>
+          </a:xfrm>
+          <a:prstGeom prst="rect">
+            <a:avLst/>
+          </a:prstGeom>
+          <a:noFill/>
+        </p:spPr>
+        <p:txBody>
+          <a:bodyPr wrap="square" lIns="0" rIns="0" tIns="0" bIns="0">
+            <a:spAutoFit/>
+          </a:bodyPr>
+          <a:lstStyle/>
+          <a:p>
+            <a:pPr algn="l"/>
+            <a:r>
+              <a:rPr sz="1100" b="1" i="0">
+                <a:solidFill>
+                  <a:srgbClr val="0AADA4"/>
+                </a:solidFill>
+                <a:latin typeface="Calibri"/>
+              </a:rPr>
+              <a:t>Side view from Earth</a:t>
+            </a:r>
+          </a:p>
+        </p:txBody>
+      </p:sp>
+      <p:sp>
+        <p:nvSpPr>
+          <p:cNvPr id="14" name="TextBox 13"/>
+          <p:cNvSpPr txBox="1"/>
+          <p:nvPr/>
+        </p:nvSpPr>
+        <p:spPr>
+          <a:xfrm>
+            <a:off x="6035040" y="2660904"/>
+            <a:ext cx="2697480" cy="329184"/>
+          </a:xfrm>
+          <a:prstGeom prst="rect">
+            <a:avLst/>
+          </a:prstGeom>
+          <a:noFill/>
+        </p:spPr>
+        <p:txBody>
+          <a:bodyPr wrap="square" lIns="0" rIns="0" tIns="0" bIns="0">
+            <a:spAutoFit/>
+          </a:bodyPr>
+          <a:lstStyle/>
+          <a:p>
+            <a:pPr algn="l"/>
+            <a:r>
+              <a:rPr sz="900" b="0" i="0">
+                <a:solidFill>
+                  <a:srgbClr val="8CAABF"/>
+                </a:solidFill>
+                <a:latin typeface="Calibri"/>
+              </a:rPr>
+              <a:t>Every star at its real distance: the cone Kepler looked down</a:t>
+            </a:r>
+          </a:p>
+        </p:txBody>
+      </p:sp>
+      <p:pic>
+        <p:nvPicPr>
+          <p:cNvPr id="15" name="Our Solar System" descr="solar.png"/>
+          <p:cNvPicPr>
+            <a:picLocks noChangeAspect="1"/>
+          </p:cNvPicPr>
+          <p:nvPr/>
+        </p:nvPicPr>
+        <p:blipFill>
+          <a:blip r:embed="rId5"/>
+          <a:stretch>
+            <a:fillRect/>
+          </a:stretch>
+        </p:blipFill>
+        <p:spPr>
+          <a:xfrm>
+            <a:off x="729227" y="3017520"/>
+            <a:ext cx="1970544" cy="1234440"/>
+          </a:xfrm>
+          <a:prstGeom prst="rect">
+            <a:avLst/>
+          </a:prstGeom>
+          <a:ln w="12700">
+            <a:solidFill>
+              <a:srgbClr val="2E4060"/>
+            </a:solidFill>
+          </a:ln>
+        </p:spPr>
+      </p:pic>
+      <p:sp>
+        <p:nvSpPr>
+          <p:cNvPr id="16" name="TextBox 15"/>
+          <p:cNvSpPr txBox="1"/>
+          <p:nvPr/>
+        </p:nvSpPr>
+        <p:spPr>
+          <a:xfrm>
+            <a:off x="365760" y="4315968"/>
+            <a:ext cx="2697480" cy="201168"/>
+          </a:xfrm>
+          <a:prstGeom prst="rect">
+            <a:avLst/>
+          </a:prstGeom>
+          <a:noFill/>
+        </p:spPr>
+        <p:txBody>
+          <a:bodyPr wrap="square" lIns="0" rIns="0" tIns="0" bIns="0">
+            <a:spAutoFit/>
+          </a:bodyPr>
+          <a:lstStyle/>
+          <a:p>
+            <a:pPr algn="l"/>
+            <a:r>
+              <a:rPr sz="1100" b="1" i="0">
+                <a:solidFill>
+                  <a:srgbClr val="0AADA4"/>
+                </a:solidFill>
+                <a:latin typeface="Calibri"/>
+              </a:rPr>
+              <a:t>Our Solar System</a:t>
+            </a:r>
+          </a:p>
+        </p:txBody>
+      </p:sp>
+      <p:sp>
+        <p:nvSpPr>
+          <p:cNvPr id="17" name="TextBox 16"/>
+          <p:cNvSpPr txBox="1"/>
+          <p:nvPr/>
+        </p:nvSpPr>
+        <p:spPr>
+          <a:xfrm>
+            <a:off x="365760" y="4535424"/>
+            <a:ext cx="2697480" cy="329184"/>
+          </a:xfrm>
+          <a:prstGeom prst="rect">
+            <a:avLst/>
+          </a:prstGeom>
+          <a:noFill/>
+        </p:spPr>
+        <p:txBody>
+          <a:bodyPr wrap="square" lIns="0" rIns="0" tIns="0" bIns="0">
+            <a:spAutoFit/>
+          </a:bodyPr>
+          <a:lstStyle/>
+          <a:p>
+            <a:pPr algn="l"/>
+            <a:r>
+              <a:rPr sz="900" b="0" i="0">
+                <a:solidFill>
+                  <a:srgbClr val="8CAABF"/>
+                </a:solidFill>
+                <a:latin typeface="Calibri"/>
+              </a:rPr>
+              <a:t>Hidden: search "home". NASA facts and real pixel planets</a:t>
+            </a:r>
+          </a:p>
+        </p:txBody>
+      </p:sp>
+      <p:pic>
+        <p:nvPicPr>
+          <p:cNvPr id="18" name="Our spacecraft" descr="craft.png"/>
+          <p:cNvPicPr>
+            <a:picLocks noChangeAspect="1"/>
+          </p:cNvPicPr>
+          <p:nvPr/>
+        </p:nvPicPr>
+        <p:blipFill>
+          <a:blip r:embed="rId6"/>
+          <a:stretch>
+            <a:fillRect/>
+          </a:stretch>
+        </p:blipFill>
+        <p:spPr>
+          <a:xfrm>
+            <a:off x="3563867" y="3017520"/>
+            <a:ext cx="1970544" cy="1234440"/>
+          </a:xfrm>
+          <a:prstGeom prst="rect">
+            <a:avLst/>
+          </a:prstGeom>
+          <a:ln w="12700">
+            <a:solidFill>
+              <a:srgbClr val="2E4060"/>
+            </a:solidFill>
+          </a:ln>
+        </p:spPr>
+      </p:pic>
+      <p:sp>
+        <p:nvSpPr>
+          <p:cNvPr id="19" name="TextBox 18"/>
+          <p:cNvSpPr txBox="1"/>
+          <p:nvPr/>
+        </p:nvSpPr>
+        <p:spPr>
+          <a:xfrm>
+            <a:off x="3200400" y="4315968"/>
+            <a:ext cx="2697480" cy="201168"/>
+          </a:xfrm>
+          <a:prstGeom prst="rect">
+            <a:avLst/>
+          </a:prstGeom>
+          <a:noFill/>
+        </p:spPr>
+        <p:txBody>
+          <a:bodyPr wrap="square" lIns="0" rIns="0" tIns="0" bIns="0">
+            <a:spAutoFit/>
+          </a:bodyPr>
+          <a:lstStyle/>
+          <a:p>
+            <a:pPr algn="l"/>
+            <a:r>
+              <a:rPr sz="1100" b="1" i="0">
+                <a:solidFill>
+                  <a:srgbClr val="0AADA4"/>
+                </a:solidFill>
+                <a:latin typeface="Calibri"/>
+              </a:rPr>
+              <a:t>Our spacecraft</a:t>
+            </a:r>
+          </a:p>
+        </p:txBody>
+      </p:sp>
+      <p:sp>
+        <p:nvSpPr>
+          <p:cNvPr id="20" name="TextBox 19"/>
+          <p:cNvSpPr txBox="1"/>
+          <p:nvPr/>
+        </p:nvSpPr>
+        <p:spPr>
+          <a:xfrm>
+            <a:off x="3200400" y="4535424"/>
+            <a:ext cx="2697480" cy="329184"/>
+          </a:xfrm>
+          <a:prstGeom prst="rect">
+            <a:avLst/>
+          </a:prstGeom>
+          <a:noFill/>
+        </p:spPr>
+        <p:txBody>
+          <a:bodyPr wrap="square" lIns="0" rIns="0" tIns="0" bIns="0">
+            <a:spAutoFit/>
+          </a:bodyPr>
+          <a:lstStyle/>
+          <a:p>
+            <a:pPr algn="l"/>
+            <a:r>
+              <a:rPr sz="900" b="0" i="0">
+                <a:solidFill>
+                  <a:srgbClr val="8CAABF"/>
+                </a:solidFill>
+                <a:latin typeface="Calibri"/>
+              </a:rPr>
+              <a:t>19 probes at their real positions (NASA JPL Horizons)</a:t>
+            </a:r>
+          </a:p>
+        </p:txBody>
+      </p:sp>
+      <p:pic>
+        <p:nvPicPr>
+          <p:cNvPr id="21" name="The space station" descr="iss.png"/>
+          <p:cNvPicPr>
+            <a:picLocks noChangeAspect="1"/>
+          </p:cNvPicPr>
+          <p:nvPr/>
+        </p:nvPicPr>
+        <p:blipFill>
+          <a:blip r:embed="rId7"/>
+          <a:stretch>
+            <a:fillRect/>
+          </a:stretch>
+        </p:blipFill>
+        <p:spPr>
+          <a:xfrm>
+            <a:off x="6395901" y="3017520"/>
+            <a:ext cx="1975757" cy="1234440"/>
+          </a:xfrm>
+          <a:prstGeom prst="rect">
+            <a:avLst/>
+          </a:prstGeom>
+          <a:ln w="12700">
+            <a:solidFill>
+              <a:srgbClr val="2E4060"/>
+            </a:solidFill>
+          </a:ln>
+        </p:spPr>
+      </p:pic>
+      <p:sp>
+        <p:nvSpPr>
+          <p:cNvPr id="22" name="TextBox 21"/>
+          <p:cNvSpPr txBox="1"/>
+          <p:nvPr/>
+        </p:nvSpPr>
+        <p:spPr>
+          <a:xfrm>
+            <a:off x="6035040" y="4315968"/>
+            <a:ext cx="2697480" cy="201168"/>
+          </a:xfrm>
+          <a:prstGeom prst="rect">
+            <a:avLst/>
+          </a:prstGeom>
+          <a:noFill/>
+        </p:spPr>
+        <p:txBody>
+          <a:bodyPr wrap="square" lIns="0" rIns="0" tIns="0" bIns="0">
+            <a:spAutoFit/>
+          </a:bodyPr>
+          <a:lstStyle/>
+          <a:p>
+            <a:pPr algn="l"/>
+            <a:r>
+              <a:rPr sz="1100" b="1" i="0">
+                <a:solidFill>
+                  <a:srgbClr val="0AADA4"/>
+                </a:solidFill>
+                <a:latin typeface="Calibri"/>
+              </a:rPr>
+              <a:t>The space station</a:t>
+            </a:r>
+          </a:p>
+        </p:txBody>
+      </p:sp>
+      <p:sp>
+        <p:nvSpPr>
+          <p:cNvPr id="23" name="TextBox 22"/>
+          <p:cNvSpPr txBox="1"/>
+          <p:nvPr/>
+        </p:nvSpPr>
+        <p:spPr>
+          <a:xfrm>
+            <a:off x="6035040" y="4535424"/>
+            <a:ext cx="2697480" cy="329184"/>
+          </a:xfrm>
+          <a:prstGeom prst="rect">
+            <a:avLst/>
+          </a:prstGeom>
+          <a:noFill/>
+        </p:spPr>
+        <p:txBody>
+          <a:bodyPr wrap="square" lIns="0" rIns="0" tIns="0" bIns="0">
+            <a:spAutoFit/>
+          </a:bodyPr>
+          <a:lstStyle/>
+          <a:p>
+            <a:pPr algn="l"/>
+            <a:r>
+              <a:rPr sz="900" b="0" i="0">
+                <a:solidFill>
+                  <a:srgbClr val="8CAABF"/>
+                </a:solidFill>
+                <a:latin typeface="Calibri"/>
+              </a:rPr>
+              <a:t>A to-scale orbit and NASA's facts about the ISS</a:t>
+            </a:r>
+          </a:p>
+        </p:txBody>
+      </p:sp>
+    </p:spTree>
+  </p:cSld>
+  <p:clrMapOvr>
+    <a:masterClrMapping/>
+  </p:clrMapOvr>
+</p:sld>
+</file>
+
+<file path=ppt/slides/slide12.xml><?xml version="1.0" encoding="utf-8"?>
+<p:sld xmlns:a="http://schemas.openxmlformats.org/drawingml/2006/main" xmlns:p="http://schemas.openxmlformats.org/presentationml/2006/main" xmlns:r="http://schemas.openxmlformats.org/officeDocument/2006/relationships">
+  <p:cSld>
+    <p:bg>
+      <p:bgPr>
+        <a:solidFill>
+          <a:srgbClr val="0B1120"/>
+        </a:solidFill>
+        <a:effectLst/>
+      </p:bgPr>
+    </p:bg>
+    <p:spTree>
+      <p:nvGrpSpPr>
+        <p:cNvPr id="1" name=""/>
+        <p:cNvGrpSpPr/>
+        <p:nvPr/>
+      </p:nvGrpSpPr>
+      <p:grpSpPr/>
+      <p:sp>
+        <p:nvSpPr>
+          <p:cNvPr id="2" name="Header band"/>
+          <p:cNvSpPr/>
+          <p:nvPr/>
+        </p:nvSpPr>
+        <p:spPr>
+          <a:xfrm>
+            <a:off x="0" y="0"/>
+            <a:ext cx="9144000" cy="1005840"/>
+          </a:xfrm>
+          <a:prstGeom prst="rect">
+            <a:avLst/>
+          </a:prstGeom>
+          <a:solidFill>
+            <a:srgbClr val="0F1E3C"/>
+          </a:solidFill>
+          <a:ln>
+            <a:noFill/>
+          </a:ln>
+          <a:effectLst/>
+        </p:spPr>
+        <p:style>
+          <a:lnRef idx="1">
+            <a:schemeClr val="accent1"/>
+          </a:lnRef>
+          <a:fillRef idx="3">
+            <a:schemeClr val="accent1"/>
+          </a:fillRef>
+          <a:effectRef idx="2">
+            <a:schemeClr val="accent1"/>
+          </a:effectRef>
+          <a:fontRef idx="minor">
+            <a:schemeClr val="lt1"/>
+          </a:fontRef>
+        </p:style>
+        <p:txBody>
+          <a:bodyPr rtlCol="0" anchor="ctr"/>
+          <a:lstStyle/>
+          <a:p>
+            <a:pPr algn="ctr"/>
+          </a:p>
+        </p:txBody>
+      </p:sp>
+      <p:sp>
+        <p:nvSpPr>
+          <p:cNvPr id="3" name="Title"/>
+          <p:cNvSpPr txBox="1"/>
+          <p:nvPr/>
+        </p:nvSpPr>
+        <p:spPr>
+          <a:xfrm>
+            <a:off x="457200" y="256032"/>
+            <a:ext cx="6583680" cy="548640"/>
+          </a:xfrm>
+          <a:prstGeom prst="rect">
+            <a:avLst/>
+          </a:prstGeom>
+          <a:noFill/>
+        </p:spPr>
+        <p:txBody>
+          <a:bodyPr wrap="square" lIns="0" rIns="0" tIns="0" bIns="0">
+            <a:spAutoFit/>
+          </a:bodyPr>
+          <a:lstStyle/>
+          <a:p>
+            <a:pPr algn="l"/>
+            <a:r>
+              <a:rPr sz="2800" b="1" i="0">
+                <a:solidFill>
+                  <a:srgbClr val="FFFFFF"/>
+                </a:solidFill>
+                <a:latin typeface="Calibri"/>
+              </a:rPr>
+              <a:t>Engineering &amp; Security</a:t>
+            </a:r>
+          </a:p>
+        </p:txBody>
+      </p:sp>
+      <p:sp>
+        <p:nvSpPr>
+          <p:cNvPr id="4" name="Badge"/>
+          <p:cNvSpPr/>
+          <p:nvPr/>
+        </p:nvSpPr>
+        <p:spPr>
+          <a:xfrm>
+            <a:off x="7132320" y="228600"/>
+            <a:ext cx="1645920" cy="548640"/>
+          </a:xfrm>
+          <a:prstGeom prst="rect">
+            <a:avLst/>
+          </a:prstGeom>
+          <a:solidFill>
+            <a:srgbClr val="0F1E3C"/>
+          </a:solidFill>
+          <a:ln w="12700">
+            <a:solidFill>
+              <a:srgbClr val="0AADA4"/>
+            </a:solidFill>
+          </a:ln>
+          <a:effectLst/>
+        </p:spPr>
+        <p:style>
+          <a:lnRef idx="1">
+            <a:schemeClr val="accent1"/>
+          </a:lnRef>
+          <a:fillRef idx="3">
+            <a:schemeClr val="accent1"/>
+          </a:fillRef>
+          <a:effectRef idx="2">
+            <a:schemeClr val="accent1"/>
+          </a:effectRef>
+          <a:fontRef idx="minor">
+            <a:schemeClr val="lt1"/>
+          </a:fontRef>
+        </p:style>
+        <p:txBody>
+          <a:bodyPr rtlCol="0" anchor="ctr"/>
+          <a:lstStyle/>
+          <a:p>
+            <a:pPr algn="ctr"/>
+          </a:p>
+        </p:txBody>
+      </p:sp>
+      <p:sp>
+        <p:nvSpPr>
+          <p:cNvPr id="5" name="TextBox 4"/>
+          <p:cNvSpPr txBox="1"/>
+          <p:nvPr/>
+        </p:nvSpPr>
+        <p:spPr>
+          <a:xfrm>
+            <a:off x="7132320" y="393192"/>
+            <a:ext cx="1645920" cy="274320"/>
+          </a:xfrm>
+          <a:prstGeom prst="rect">
+            <a:avLst/>
+          </a:prstGeom>
+          <a:noFill/>
+        </p:spPr>
+        <p:txBody>
+          <a:bodyPr wrap="square" lIns="0" rIns="0" tIns="0" bIns="0">
+            <a:spAutoFit/>
+          </a:bodyPr>
+          <a:lstStyle/>
+          <a:p>
+            <a:pPr algn="ctr"/>
+            <a:r>
+              <a:rPr sz="1000" b="1" i="0">
+                <a:solidFill>
+                  <a:srgbClr val="0AADA4"/>
+                </a:solidFill>
+                <a:latin typeface="Calibri"/>
+              </a:rPr>
+              <a:t>BUILT RIGHT</a:t>
+            </a:r>
+          </a:p>
+        </p:txBody>
+      </p:sp>
+      <p:sp>
+        <p:nvSpPr>
+          <p:cNvPr id="6" name="Card 1"/>
+          <p:cNvSpPr/>
+          <p:nvPr/>
+        </p:nvSpPr>
+        <p:spPr>
+          <a:xfrm>
+            <a:off x="365760" y="1115568"/>
+            <a:ext cx="2697480" cy="1298448"/>
+          </a:xfrm>
+          <a:prstGeom prst="rect">
+            <a:avLst/>
+          </a:prstGeom>
+          <a:solidFill>
+            <a:srgbClr val="132140"/>
+          </a:solidFill>
+          <a:ln w="12700">
+            <a:solidFill>
+              <a:srgbClr val="2E4060"/>
+            </a:solidFill>
+          </a:ln>
+          <a:effectLst/>
+        </p:spPr>
+        <p:style>
+          <a:lnRef idx="1">
+            <a:schemeClr val="accent1"/>
+          </a:lnRef>
+          <a:fillRef idx="3">
+            <a:schemeClr val="accent1"/>
+          </a:fillRef>
+          <a:effectRef idx="2">
+            <a:schemeClr val="accent1"/>
+          </a:effectRef>
+          <a:fontRef idx="minor">
+            <a:schemeClr val="lt1"/>
+          </a:fontRef>
+        </p:style>
+        <p:txBody>
+          <a:bodyPr rtlCol="0" anchor="ctr"/>
+          <a:lstStyle/>
+          <a:p>
+            <a:pPr algn="ctr"/>
+          </a:p>
+        </p:txBody>
+      </p:sp>
+      <p:sp>
+        <p:nvSpPr>
+          <p:cNvPr id="7" name="Card 1 number"/>
+          <p:cNvSpPr/>
+          <p:nvPr/>
+        </p:nvSpPr>
+        <p:spPr>
+          <a:xfrm>
+            <a:off x="502920" y="1252728"/>
+            <a:ext cx="292608" cy="292608"/>
+          </a:xfrm>
+          <a:prstGeom prst="ellipse">
+            <a:avLst/>
+          </a:prstGeom>
+          <a:solidFill>
+            <a:srgbClr val="3D9BE9"/>
+          </a:solidFill>
+          <a:ln>
+            <a:noFill/>
+          </a:ln>
+          <a:effectLst/>
+        </p:spPr>
+        <p:style>
+          <a:lnRef idx="1">
+            <a:schemeClr val="accent1"/>
+          </a:lnRef>
+          <a:fillRef idx="3">
+            <a:schemeClr val="accent1"/>
+          </a:fillRef>
+          <a:effectRef idx="2">
+            <a:schemeClr val="accent1"/>
+          </a:effectRef>
+          <a:fontRef idx="minor">
+            <a:schemeClr val="lt1"/>
+          </a:fontRef>
+        </p:style>
+        <p:txBody>
+          <a:bodyPr rtlCol="0" anchor="ctr"/>
+          <a:lstStyle/>
+          <a:p/>
+        </p:txBody>
+      </p:sp>
+      <p:sp>
+        <p:nvSpPr>
+          <p:cNvPr id="8" name="TextBox 7"/>
+          <p:cNvSpPr txBox="1"/>
+          <p:nvPr/>
+        </p:nvSpPr>
+        <p:spPr>
+          <a:xfrm>
+            <a:off x="502920" y="1298448"/>
+            <a:ext cx="292608" cy="219456"/>
+          </a:xfrm>
+          <a:prstGeom prst="rect">
+            <a:avLst/>
+          </a:prstGeom>
+          <a:noFill/>
+        </p:spPr>
+        <p:txBody>
+          <a:bodyPr wrap="square" lIns="0" rIns="0" tIns="0" bIns="0">
+            <a:spAutoFit/>
+          </a:bodyPr>
+          <a:lstStyle/>
+          <a:p>
+            <a:pPr algn="ctr"/>
+            <a:r>
+              <a:rPr sz="1000" b="1" i="0">
+                <a:solidFill>
+                  <a:srgbClr val="0B1120"/>
+                </a:solidFill>
+                <a:latin typeface="Calibri"/>
+              </a:rPr>
+              <a:t>1</a:t>
+            </a:r>
+          </a:p>
+        </p:txBody>
+      </p:sp>
+      <p:sp>
+        <p:nvSpPr>
+          <p:cNvPr id="9" name="TextBox 8"/>
+          <p:cNvSpPr txBox="1"/>
+          <p:nvPr/>
+        </p:nvSpPr>
+        <p:spPr>
+          <a:xfrm>
+            <a:off x="896112" y="1271016"/>
+            <a:ext cx="2057400" cy="274320"/>
+          </a:xfrm>
+          <a:prstGeom prst="rect">
+            <a:avLst/>
+          </a:prstGeom>
+          <a:noFill/>
+        </p:spPr>
+        <p:txBody>
+          <a:bodyPr wrap="square" lIns="0" rIns="0" tIns="0" bIns="0">
+            <a:spAutoFit/>
+          </a:bodyPr>
+          <a:lstStyle/>
+          <a:p>
+            <a:pPr algn="l"/>
+            <a:r>
+              <a:rPr sz="1200" b="1" i="0">
+                <a:solidFill>
+                  <a:srgbClr val="3D9BE9"/>
+                </a:solidFill>
+                <a:latin typeface="Calibri"/>
+              </a:rPr>
+              <a:t>Encrypted model</a:t>
+            </a:r>
+          </a:p>
+        </p:txBody>
+      </p:sp>
+      <p:sp>
+        <p:nvSpPr>
+          <p:cNvPr id="10" name="TextBox 9"/>
+          <p:cNvSpPr txBox="1"/>
+          <p:nvPr/>
+        </p:nvSpPr>
+        <p:spPr>
+          <a:xfrm>
+            <a:off x="502920" y="1645919"/>
+            <a:ext cx="2423160" cy="384048"/>
+          </a:xfrm>
+          <a:prstGeom prst="rect">
+            <a:avLst/>
+          </a:prstGeom>
+          <a:noFill/>
+        </p:spPr>
+        <p:txBody>
+          <a:bodyPr wrap="square" lIns="0" rIns="0" tIns="0" bIns="0">
+            <a:spAutoFit/>
+          </a:bodyPr>
+          <a:lstStyle/>
+          <a:p>
+            <a:pPr algn="l"/>
+            <a:r>
+              <a:rPr sz="1000" b="0" i="0">
+                <a:solidFill>
+                  <a:srgbClr val="FFFFFF"/>
+                </a:solidFill>
+                <a:latin typeface="Calibri"/>
+              </a:rPr>
+              <a:t>AES-256-GCM, split under GitHub's size limit; verify, rotate, passphrase</a:t>
+            </a:r>
+          </a:p>
+        </p:txBody>
+      </p:sp>
+      <p:sp>
+        <p:nvSpPr>
+          <p:cNvPr id="11" name="TextBox 10"/>
+          <p:cNvSpPr txBox="1"/>
+          <p:nvPr/>
+        </p:nvSpPr>
+        <p:spPr>
+          <a:xfrm>
+            <a:off x="502920" y="2066543"/>
+            <a:ext cx="2423160" cy="292608"/>
+          </a:xfrm>
+          <a:prstGeom prst="rect">
+            <a:avLst/>
+          </a:prstGeom>
+          <a:noFill/>
+        </p:spPr>
+        <p:txBody>
+          <a:bodyPr wrap="square" lIns="0" rIns="0" tIns="0" bIns="0">
+            <a:spAutoFit/>
+          </a:bodyPr>
+          <a:lstStyle/>
+          <a:p>
+            <a:pPr algn="l"/>
+            <a:r>
+              <a:rPr sz="900" b="0" i="1">
+                <a:solidFill>
+                  <a:srgbClr val="8CAABF"/>
+                </a:solidFill>
+                <a:latin typeface="Calibri"/>
+              </a:rPr>
+              <a:t>Public repo, private trained model</a:t>
+            </a:r>
+          </a:p>
+        </p:txBody>
+      </p:sp>
+      <p:sp>
+        <p:nvSpPr>
+          <p:cNvPr id="12" name="Card 2"/>
+          <p:cNvSpPr/>
+          <p:nvPr/>
+        </p:nvSpPr>
+        <p:spPr>
+          <a:xfrm>
+            <a:off x="3200400" y="1115568"/>
+            <a:ext cx="2697480" cy="1298448"/>
+          </a:xfrm>
+          <a:prstGeom prst="rect">
+            <a:avLst/>
+          </a:prstGeom>
+          <a:solidFill>
+            <a:srgbClr val="132140"/>
+          </a:solidFill>
+          <a:ln w="12700">
+            <a:solidFill>
+              <a:srgbClr val="2E4060"/>
+            </a:solidFill>
+          </a:ln>
+          <a:effectLst/>
+        </p:spPr>
+        <p:style>
+          <a:lnRef idx="1">
+            <a:schemeClr val="accent1"/>
+          </a:lnRef>
+          <a:fillRef idx="3">
+            <a:schemeClr val="accent1"/>
+          </a:fillRef>
+          <a:effectRef idx="2">
+            <a:schemeClr val="accent1"/>
+          </a:effectRef>
+          <a:fontRef idx="minor">
+            <a:schemeClr val="lt1"/>
+          </a:fontRef>
+        </p:style>
+        <p:txBody>
+          <a:bodyPr rtlCol="0" anchor="ctr"/>
+          <a:lstStyle/>
+          <a:p>
+            <a:pPr algn="ctr"/>
+          </a:p>
+        </p:txBody>
+      </p:sp>
+      <p:sp>
+        <p:nvSpPr>
+          <p:cNvPr id="13" name="Card 2 number"/>
+          <p:cNvSpPr/>
+          <p:nvPr/>
+        </p:nvSpPr>
+        <p:spPr>
+          <a:xfrm>
+            <a:off x="3337560" y="1252728"/>
+            <a:ext cx="292608" cy="292608"/>
+          </a:xfrm>
+          <a:prstGeom prst="ellipse">
+            <a:avLst/>
+          </a:prstGeom>
+          <a:solidFill>
+            <a:srgbClr val="3D9BE9"/>
+          </a:solidFill>
+          <a:ln>
+            <a:noFill/>
+          </a:ln>
+          <a:effectLst/>
+        </p:spPr>
+        <p:style>
+          <a:lnRef idx="1">
+            <a:schemeClr val="accent1"/>
+          </a:lnRef>
+          <a:fillRef idx="3">
+            <a:schemeClr val="accent1"/>
+          </a:fillRef>
+          <a:effectRef idx="2">
+            <a:schemeClr val="accent1"/>
+          </a:effectRef>
+          <a:fontRef idx="minor">
+            <a:schemeClr val="lt1"/>
+          </a:fontRef>
+        </p:style>
+        <p:txBody>
+          <a:bodyPr rtlCol="0" anchor="ctr"/>
+          <a:lstStyle/>
+          <a:p/>
+        </p:txBody>
+      </p:sp>
+      <p:sp>
+        <p:nvSpPr>
+          <p:cNvPr id="14" name="TextBox 13"/>
+          <p:cNvSpPr txBox="1"/>
+          <p:nvPr/>
+        </p:nvSpPr>
+        <p:spPr>
+          <a:xfrm>
+            <a:off x="3337560" y="1298448"/>
+            <a:ext cx="292608" cy="219456"/>
+          </a:xfrm>
+          <a:prstGeom prst="rect">
+            <a:avLst/>
+          </a:prstGeom>
+          <a:noFill/>
+        </p:spPr>
+        <p:txBody>
+          <a:bodyPr wrap="square" lIns="0" rIns="0" tIns="0" bIns="0">
+            <a:spAutoFit/>
+          </a:bodyPr>
+          <a:lstStyle/>
+          <a:p>
+            <a:pPr algn="ctr"/>
+            <a:r>
+              <a:rPr sz="1000" b="1" i="0">
+                <a:solidFill>
+                  <a:srgbClr val="0B1120"/>
+                </a:solidFill>
+                <a:latin typeface="Calibri"/>
+              </a:rPr>
+              <a:t>2</a:t>
+            </a:r>
+          </a:p>
+        </p:txBody>
+      </p:sp>
+      <p:sp>
+        <p:nvSpPr>
+          <p:cNvPr id="15" name="TextBox 14"/>
+          <p:cNvSpPr txBox="1"/>
+          <p:nvPr/>
+        </p:nvSpPr>
+        <p:spPr>
+          <a:xfrm>
+            <a:off x="3730752" y="1271016"/>
+            <a:ext cx="2057400" cy="274320"/>
+          </a:xfrm>
+          <a:prstGeom prst="rect">
+            <a:avLst/>
+          </a:prstGeom>
+          <a:noFill/>
+        </p:spPr>
+        <p:txBody>
+          <a:bodyPr wrap="square" lIns="0" rIns="0" tIns="0" bIns="0">
+            <a:spAutoFit/>
+          </a:bodyPr>
+          <a:lstStyle/>
+          <a:p>
+            <a:pPr algn="l"/>
+            <a:r>
+              <a:rPr sz="1200" b="1" i="0">
+                <a:solidFill>
+                  <a:srgbClr val="3D9BE9"/>
+                </a:solidFill>
+                <a:latin typeface="Calibri"/>
+              </a:rPr>
+              <a:t>Locked-down website</a:t>
+            </a:r>
+          </a:p>
+        </p:txBody>
+      </p:sp>
+      <p:sp>
+        <p:nvSpPr>
+          <p:cNvPr id="16" name="TextBox 15"/>
+          <p:cNvSpPr txBox="1"/>
+          <p:nvPr/>
+        </p:nvSpPr>
+        <p:spPr>
+          <a:xfrm>
+            <a:off x="3337560" y="1645919"/>
+            <a:ext cx="2423160" cy="384048"/>
+          </a:xfrm>
+          <a:prstGeom prst="rect">
+            <a:avLst/>
+          </a:prstGeom>
+          <a:noFill/>
+        </p:spPr>
+        <p:txBody>
+          <a:bodyPr wrap="square" lIns="0" rIns="0" tIns="0" bIns="0">
+            <a:spAutoFit/>
+          </a:bodyPr>
+          <a:lstStyle/>
+          <a:p>
+            <a:pPr algn="l"/>
+            <a:r>
+              <a:rPr sz="1000" b="0" i="0">
+                <a:solidFill>
+                  <a:srgbClr val="FFFFFF"/>
+                </a:solidFill>
+                <a:latin typeface="Calibri"/>
+              </a:rPr>
+              <a:t>Strict Content Security Policy, escaped data, clickjacking guard</a:t>
+            </a:r>
+          </a:p>
+        </p:txBody>
+      </p:sp>
+      <p:sp>
+        <p:nvSpPr>
+          <p:cNvPr id="17" name="TextBox 16"/>
+          <p:cNvSpPr txBox="1"/>
+          <p:nvPr/>
+        </p:nvSpPr>
+        <p:spPr>
+          <a:xfrm>
+            <a:off x="3337560" y="2066543"/>
+            <a:ext cx="2423160" cy="292608"/>
+          </a:xfrm>
+          <a:prstGeom prst="rect">
+            <a:avLst/>
+          </a:prstGeom>
+          <a:noFill/>
+        </p:spPr>
+        <p:txBody>
+          <a:bodyPr wrap="square" lIns="0" rIns="0" tIns="0" bIns="0">
+            <a:spAutoFit/>
+          </a:bodyPr>
+          <a:lstStyle/>
+          <a:p>
+            <a:pPr algn="l"/>
+            <a:r>
+              <a:rPr sz="900" b="0" i="1">
+                <a:solidFill>
+                  <a:srgbClr val="8CAABF"/>
+                </a:solidFill>
+                <a:latin typeface="Calibri"/>
+              </a:rPr>
+              <a:t>No inline code, no tracking, no cookies</a:t>
+            </a:r>
+          </a:p>
+        </p:txBody>
+      </p:sp>
+      <p:sp>
+        <p:nvSpPr>
+          <p:cNvPr id="18" name="Card 3"/>
+          <p:cNvSpPr/>
+          <p:nvPr/>
+        </p:nvSpPr>
+        <p:spPr>
+          <a:xfrm>
+            <a:off x="6035040" y="1115568"/>
+            <a:ext cx="2697480" cy="1298448"/>
+          </a:xfrm>
+          <a:prstGeom prst="rect">
+            <a:avLst/>
+          </a:prstGeom>
+          <a:solidFill>
+            <a:srgbClr val="132140"/>
+          </a:solidFill>
+          <a:ln w="12700">
+            <a:solidFill>
+              <a:srgbClr val="2E4060"/>
+            </a:solidFill>
+          </a:ln>
+          <a:effectLst/>
+        </p:spPr>
+        <p:style>
+          <a:lnRef idx="1">
+            <a:schemeClr val="accent1"/>
+          </a:lnRef>
+          <a:fillRef idx="3">
+            <a:schemeClr val="accent1"/>
+          </a:fillRef>
+          <a:effectRef idx="2">
+            <a:schemeClr val="accent1"/>
+          </a:effectRef>
+          <a:fontRef idx="minor">
+            <a:schemeClr val="lt1"/>
+          </a:fontRef>
+        </p:style>
+        <p:txBody>
+          <a:bodyPr rtlCol="0" anchor="ctr"/>
+          <a:lstStyle/>
+          <a:p>
+            <a:pPr algn="ctr"/>
+          </a:p>
+        </p:txBody>
+      </p:sp>
+      <p:sp>
+        <p:nvSpPr>
+          <p:cNvPr id="19" name="Card 3 number"/>
+          <p:cNvSpPr/>
+          <p:nvPr/>
+        </p:nvSpPr>
+        <p:spPr>
+          <a:xfrm>
+            <a:off x="6172200" y="1252728"/>
+            <a:ext cx="292608" cy="292608"/>
+          </a:xfrm>
+          <a:prstGeom prst="ellipse">
+            <a:avLst/>
+          </a:prstGeom>
+          <a:solidFill>
+            <a:srgbClr val="3D9BE9"/>
+          </a:solidFill>
+          <a:ln>
+            <a:noFill/>
+          </a:ln>
+          <a:effectLst/>
+        </p:spPr>
+        <p:style>
+          <a:lnRef idx="1">
+            <a:schemeClr val="accent1"/>
+          </a:lnRef>
+          <a:fillRef idx="3">
+            <a:schemeClr val="accent1"/>
+          </a:fillRef>
+          <a:effectRef idx="2">
+            <a:schemeClr val="accent1"/>
+          </a:effectRef>
+          <a:fontRef idx="minor">
+            <a:schemeClr val="lt1"/>
+          </a:fontRef>
+        </p:style>
+        <p:txBody>
+          <a:bodyPr rtlCol="0" anchor="ctr"/>
+          <a:lstStyle/>
+          <a:p/>
+        </p:txBody>
+      </p:sp>
+      <p:sp>
+        <p:nvSpPr>
+          <p:cNvPr id="20" name="TextBox 19"/>
+          <p:cNvSpPr txBox="1"/>
+          <p:nvPr/>
+        </p:nvSpPr>
+        <p:spPr>
+          <a:xfrm>
+            <a:off x="6172200" y="1298448"/>
+            <a:ext cx="292608" cy="219456"/>
+          </a:xfrm>
+          <a:prstGeom prst="rect">
+            <a:avLst/>
+          </a:prstGeom>
+          <a:noFill/>
+        </p:spPr>
+        <p:txBody>
+          <a:bodyPr wrap="square" lIns="0" rIns="0" tIns="0" bIns="0">
+            <a:spAutoFit/>
+          </a:bodyPr>
+          <a:lstStyle/>
+          <a:p>
+            <a:pPr algn="ctr"/>
+            <a:r>
+              <a:rPr sz="1000" b="1" i="0">
+                <a:solidFill>
+                  <a:srgbClr val="0B1120"/>
+                </a:solidFill>
+                <a:latin typeface="Calibri"/>
+              </a:rPr>
+              <a:t>3</a:t>
+            </a:r>
+          </a:p>
+        </p:txBody>
+      </p:sp>
+      <p:sp>
+        <p:nvSpPr>
+          <p:cNvPr id="21" name="TextBox 20"/>
+          <p:cNvSpPr txBox="1"/>
+          <p:nvPr/>
+        </p:nvSpPr>
+        <p:spPr>
+          <a:xfrm>
+            <a:off x="6565392" y="1271016"/>
+            <a:ext cx="2057400" cy="274320"/>
+          </a:xfrm>
+          <a:prstGeom prst="rect">
+            <a:avLst/>
+          </a:prstGeom>
+          <a:noFill/>
+        </p:spPr>
+        <p:txBody>
+          <a:bodyPr wrap="square" lIns="0" rIns="0" tIns="0" bIns="0">
+            <a:spAutoFit/>
+          </a:bodyPr>
+          <a:lstStyle/>
+          <a:p>
+            <a:pPr algn="l"/>
+            <a:r>
+              <a:rPr sz="1200" b="1" i="0">
+                <a:solidFill>
+                  <a:srgbClr val="3D9BE9"/>
+                </a:solidFill>
+                <a:latin typeface="Calibri"/>
+              </a:rPr>
+              <a:t>Supply chain</a:t>
+            </a:r>
+          </a:p>
+        </p:txBody>
+      </p:sp>
+      <p:sp>
+        <p:nvSpPr>
+          <p:cNvPr id="22" name="TextBox 21"/>
+          <p:cNvSpPr txBox="1"/>
+          <p:nvPr/>
+        </p:nvSpPr>
+        <p:spPr>
+          <a:xfrm>
+            <a:off x="6172200" y="1645919"/>
+            <a:ext cx="2423160" cy="384048"/>
+          </a:xfrm>
+          <a:prstGeom prst="rect">
+            <a:avLst/>
+          </a:prstGeom>
+          <a:noFill/>
+        </p:spPr>
+        <p:txBody>
+          <a:bodyPr wrap="square" lIns="0" rIns="0" tIns="0" bIns="0">
+            <a:spAutoFit/>
+          </a:bodyPr>
+          <a:lstStyle/>
+          <a:p>
+            <a:pPr algn="l"/>
+            <a:r>
+              <a:rPr sz="1000" b="0" i="0">
+                <a:solidFill>
+                  <a:srgbClr val="FFFFFF"/>
+                </a:solidFill>
+                <a:latin typeface="Calibri"/>
+              </a:rPr>
+              <a:t>SHA-pinned Actions, hash-locked dependencies, CodeQL, pip-audit, Scorecard</a:t>
+            </a:r>
+          </a:p>
+        </p:txBody>
+      </p:sp>
+      <p:sp>
+        <p:nvSpPr>
+          <p:cNvPr id="23" name="TextBox 22"/>
+          <p:cNvSpPr txBox="1"/>
+          <p:nvPr/>
+        </p:nvSpPr>
+        <p:spPr>
+          <a:xfrm>
+            <a:off x="6172200" y="2066543"/>
+            <a:ext cx="2423160" cy="292608"/>
+          </a:xfrm>
+          <a:prstGeom prst="rect">
+            <a:avLst/>
+          </a:prstGeom>
+          <a:noFill/>
+        </p:spPr>
+        <p:txBody>
+          <a:bodyPr wrap="square" lIns="0" rIns="0" tIns="0" bIns="0">
+            <a:spAutoFit/>
+          </a:bodyPr>
+          <a:lstStyle/>
+          <a:p>
+            <a:pPr algn="l"/>
+            <a:r>
+              <a:rPr sz="900" b="0" i="1">
+                <a:solidFill>
+                  <a:srgbClr val="8CAABF"/>
+                </a:solidFill>
+                <a:latin typeface="Calibri"/>
+              </a:rPr>
+              <a:t>Tampered packages are refused</a:t>
+            </a:r>
+          </a:p>
+        </p:txBody>
+      </p:sp>
+      <p:sp>
+        <p:nvSpPr>
+          <p:cNvPr id="24" name="Card 4"/>
+          <p:cNvSpPr/>
+          <p:nvPr/>
+        </p:nvSpPr>
+        <p:spPr>
+          <a:xfrm>
+            <a:off x="365760" y="2487168"/>
+            <a:ext cx="2697480" cy="1298448"/>
+          </a:xfrm>
+          <a:prstGeom prst="rect">
+            <a:avLst/>
+          </a:prstGeom>
+          <a:solidFill>
+            <a:srgbClr val="132140"/>
+          </a:solidFill>
+          <a:ln w="12700">
+            <a:solidFill>
+              <a:srgbClr val="2E4060"/>
+            </a:solidFill>
+          </a:ln>
+          <a:effectLst/>
+        </p:spPr>
+        <p:style>
+          <a:lnRef idx="1">
+            <a:schemeClr val="accent1"/>
+          </a:lnRef>
+          <a:fillRef idx="3">
+            <a:schemeClr val="accent1"/>
+          </a:fillRef>
+          <a:effectRef idx="2">
+            <a:schemeClr val="accent1"/>
+          </a:effectRef>
+          <a:fontRef idx="minor">
+            <a:schemeClr val="lt1"/>
+          </a:fontRef>
+        </p:style>
+        <p:txBody>
+          <a:bodyPr rtlCol="0" anchor="ctr"/>
+          <a:lstStyle/>
+          <a:p>
+            <a:pPr algn="ctr"/>
+          </a:p>
+        </p:txBody>
+      </p:sp>
+      <p:sp>
+        <p:nvSpPr>
+          <p:cNvPr id="25" name="Card 4 number"/>
+          <p:cNvSpPr/>
+          <p:nvPr/>
+        </p:nvSpPr>
+        <p:spPr>
+          <a:xfrm>
+            <a:off x="502920" y="2624327"/>
+            <a:ext cx="292608" cy="292608"/>
+          </a:xfrm>
+          <a:prstGeom prst="ellipse">
+            <a:avLst/>
+          </a:prstGeom>
+          <a:solidFill>
+            <a:srgbClr val="3D9BE9"/>
+          </a:solidFill>
+          <a:ln>
+            <a:noFill/>
+          </a:ln>
+          <a:effectLst/>
+        </p:spPr>
+        <p:style>
+          <a:lnRef idx="1">
+            <a:schemeClr val="accent1"/>
+          </a:lnRef>
+          <a:fillRef idx="3">
+            <a:schemeClr val="accent1"/>
+          </a:fillRef>
+          <a:effectRef idx="2">
+            <a:schemeClr val="accent1"/>
+          </a:effectRef>
+          <a:fontRef idx="minor">
+            <a:schemeClr val="lt1"/>
+          </a:fontRef>
+        </p:style>
+        <p:txBody>
+          <a:bodyPr rtlCol="0" anchor="ctr"/>
+          <a:lstStyle/>
+          <a:p/>
+        </p:txBody>
+      </p:sp>
+      <p:sp>
+        <p:nvSpPr>
+          <p:cNvPr id="26" name="TextBox 25"/>
+          <p:cNvSpPr txBox="1"/>
+          <p:nvPr/>
+        </p:nvSpPr>
+        <p:spPr>
+          <a:xfrm>
+            <a:off x="502920" y="2670048"/>
+            <a:ext cx="292608" cy="219456"/>
+          </a:xfrm>
+          <a:prstGeom prst="rect">
+            <a:avLst/>
+          </a:prstGeom>
+          <a:noFill/>
+        </p:spPr>
+        <p:txBody>
+          <a:bodyPr wrap="square" lIns="0" rIns="0" tIns="0" bIns="0">
+            <a:spAutoFit/>
+          </a:bodyPr>
+          <a:lstStyle/>
+          <a:p>
+            <a:pPr algn="ctr"/>
+            <a:r>
+              <a:rPr sz="1000" b="1" i="0">
+                <a:solidFill>
+                  <a:srgbClr val="0B1120"/>
+                </a:solidFill>
+                <a:latin typeface="Calibri"/>
+              </a:rPr>
+              <a:t>4</a:t>
+            </a:r>
+          </a:p>
+        </p:txBody>
+      </p:sp>
+      <p:sp>
+        <p:nvSpPr>
+          <p:cNvPr id="27" name="TextBox 26"/>
+          <p:cNvSpPr txBox="1"/>
+          <p:nvPr/>
+        </p:nvSpPr>
+        <p:spPr>
+          <a:xfrm>
+            <a:off x="896112" y="2642615"/>
+            <a:ext cx="2057400" cy="274320"/>
+          </a:xfrm>
+          <a:prstGeom prst="rect">
+            <a:avLst/>
+          </a:prstGeom>
+          <a:noFill/>
+        </p:spPr>
+        <p:txBody>
+          <a:bodyPr wrap="square" lIns="0" rIns="0" tIns="0" bIns="0">
+            <a:spAutoFit/>
+          </a:bodyPr>
+          <a:lstStyle/>
+          <a:p>
+            <a:pPr algn="l"/>
+            <a:r>
+              <a:rPr sz="1200" b="1" i="0">
+                <a:solidFill>
+                  <a:srgbClr val="3D9BE9"/>
+                </a:solidFill>
+                <a:latin typeface="Calibri"/>
+              </a:rPr>
+              <a:t>110 automated tests</a:t>
+            </a:r>
+          </a:p>
+        </p:txBody>
+      </p:sp>
+      <p:sp>
+        <p:nvSpPr>
+          <p:cNvPr id="28" name="TextBox 27"/>
+          <p:cNvSpPr txBox="1"/>
+          <p:nvPr/>
+        </p:nvSpPr>
+        <p:spPr>
+          <a:xfrm>
+            <a:off x="502920" y="3017520"/>
+            <a:ext cx="2423160" cy="384048"/>
+          </a:xfrm>
+          <a:prstGeom prst="rect">
+            <a:avLst/>
+          </a:prstGeom>
+          <a:noFill/>
+        </p:spPr>
+        <p:txBody>
+          <a:bodyPr wrap="square" lIns="0" rIns="0" tIns="0" bIns="0">
+            <a:spAutoFit/>
+          </a:bodyPr>
+          <a:lstStyle/>
+          <a:p>
+            <a:pPr algn="l"/>
+            <a:r>
+              <a:rPr sz="1000" b="0" i="0">
+                <a:solidFill>
+                  <a:srgbClr val="FFFFFF"/>
+                </a:solidFill>
+                <a:latin typeface="Calibri"/>
+              </a:rPr>
+              <a:t>Including the real page in a headless browser and a colour-blind check</a:t>
+            </a:r>
+          </a:p>
+        </p:txBody>
+      </p:sp>
+      <p:sp>
+        <p:nvSpPr>
+          <p:cNvPr id="29" name="TextBox 28"/>
+          <p:cNvSpPr txBox="1"/>
+          <p:nvPr/>
+        </p:nvSpPr>
+        <p:spPr>
+          <a:xfrm>
+            <a:off x="502920" y="3438144"/>
+            <a:ext cx="2423160" cy="292608"/>
+          </a:xfrm>
+          <a:prstGeom prst="rect">
+            <a:avLst/>
+          </a:prstGeom>
+          <a:noFill/>
+        </p:spPr>
+        <p:txBody>
+          <a:bodyPr wrap="square" lIns="0" rIns="0" tIns="0" bIns="0">
+            <a:spAutoFit/>
+          </a:bodyPr>
+          <a:lstStyle/>
+          <a:p>
+            <a:pPr algn="l"/>
+            <a:r>
+              <a:rPr sz="900" b="0" i="1">
+                <a:solidFill>
+                  <a:srgbClr val="8CAABF"/>
+                </a:solidFill>
+                <a:latin typeface="Calibri"/>
+              </a:rPr>
+              <a:t>Run on every push</a:t>
+            </a:r>
+          </a:p>
+        </p:txBody>
+      </p:sp>
+      <p:sp>
+        <p:nvSpPr>
+          <p:cNvPr id="30" name="Card 5"/>
+          <p:cNvSpPr/>
+          <p:nvPr/>
+        </p:nvSpPr>
+        <p:spPr>
+          <a:xfrm>
+            <a:off x="3200400" y="2487168"/>
+            <a:ext cx="2697480" cy="1298448"/>
+          </a:xfrm>
+          <a:prstGeom prst="rect">
+            <a:avLst/>
+          </a:prstGeom>
+          <a:solidFill>
+            <a:srgbClr val="132140"/>
+          </a:solidFill>
+          <a:ln w="12700">
+            <a:solidFill>
+              <a:srgbClr val="2E4060"/>
+            </a:solidFill>
+          </a:ln>
+          <a:effectLst/>
+        </p:spPr>
+        <p:style>
+          <a:lnRef idx="1">
+            <a:schemeClr val="accent1"/>
+          </a:lnRef>
+          <a:fillRef idx="3">
+            <a:schemeClr val="accent1"/>
+          </a:fillRef>
+          <a:effectRef idx="2">
+            <a:schemeClr val="accent1"/>
+          </a:effectRef>
+          <a:fontRef idx="minor">
+            <a:schemeClr val="lt1"/>
+          </a:fontRef>
+        </p:style>
+        <p:txBody>
+          <a:bodyPr rtlCol="0" anchor="ctr"/>
+          <a:lstStyle/>
+          <a:p>
+            <a:pPr algn="ctr"/>
+          </a:p>
+        </p:txBody>
+      </p:sp>
+      <p:sp>
+        <p:nvSpPr>
+          <p:cNvPr id="31" name="Card 5 number"/>
+          <p:cNvSpPr/>
+          <p:nvPr/>
+        </p:nvSpPr>
+        <p:spPr>
+          <a:xfrm>
+            <a:off x="3337560" y="2624327"/>
+            <a:ext cx="292608" cy="292608"/>
+          </a:xfrm>
+          <a:prstGeom prst="ellipse">
+            <a:avLst/>
+          </a:prstGeom>
+          <a:solidFill>
+            <a:srgbClr val="3D9BE9"/>
+          </a:solidFill>
+          <a:ln>
+            <a:noFill/>
+          </a:ln>
+          <a:effectLst/>
+        </p:spPr>
+        <p:style>
+          <a:lnRef idx="1">
+            <a:schemeClr val="accent1"/>
+          </a:lnRef>
+          <a:fillRef idx="3">
+            <a:schemeClr val="accent1"/>
+          </a:fillRef>
+          <a:effectRef idx="2">
+            <a:schemeClr val="accent1"/>
+          </a:effectRef>
+          <a:fontRef idx="minor">
+            <a:schemeClr val="lt1"/>
+          </a:fontRef>
+        </p:style>
+        <p:txBody>
+          <a:bodyPr rtlCol="0" anchor="ctr"/>
+          <a:lstStyle/>
+          <a:p/>
+        </p:txBody>
+      </p:sp>
+      <p:sp>
+        <p:nvSpPr>
+          <p:cNvPr id="32" name="TextBox 31"/>
+          <p:cNvSpPr txBox="1"/>
+          <p:nvPr/>
+        </p:nvSpPr>
+        <p:spPr>
+          <a:xfrm>
+            <a:off x="3337560" y="2670048"/>
+            <a:ext cx="292608" cy="219456"/>
+          </a:xfrm>
+          <a:prstGeom prst="rect">
+            <a:avLst/>
+          </a:prstGeom>
+          <a:noFill/>
+        </p:spPr>
+        <p:txBody>
+          <a:bodyPr wrap="square" lIns="0" rIns="0" tIns="0" bIns="0">
+            <a:spAutoFit/>
+          </a:bodyPr>
+          <a:lstStyle/>
+          <a:p>
+            <a:pPr algn="ctr"/>
+            <a:r>
+              <a:rPr sz="1000" b="1" i="0">
+                <a:solidFill>
+                  <a:srgbClr val="0B1120"/>
+                </a:solidFill>
+                <a:latin typeface="Calibri"/>
+              </a:rPr>
+              <a:t>5</a:t>
+            </a:r>
+          </a:p>
+        </p:txBody>
+      </p:sp>
+      <p:sp>
+        <p:nvSpPr>
+          <p:cNvPr id="33" name="TextBox 32"/>
+          <p:cNvSpPr txBox="1"/>
+          <p:nvPr/>
+        </p:nvSpPr>
+        <p:spPr>
+          <a:xfrm>
+            <a:off x="3730752" y="2642615"/>
+            <a:ext cx="2057400" cy="274320"/>
+          </a:xfrm>
+          <a:prstGeom prst="rect">
+            <a:avLst/>
+          </a:prstGeom>
+          <a:noFill/>
+        </p:spPr>
+        <p:txBody>
+          <a:bodyPr wrap="square" lIns="0" rIns="0" tIns="0" bIns="0">
+            <a:spAutoFit/>
+          </a:bodyPr>
+          <a:lstStyle/>
+          <a:p>
+            <a:pPr algn="l"/>
+            <a:r>
+              <a:rPr sz="1200" b="1" i="0">
+                <a:solidFill>
+                  <a:srgbClr val="3D9BE9"/>
+                </a:solidFill>
+                <a:latin typeface="Calibri"/>
+              </a:rPr>
+              <a:t>Resumable pipeline</a:t>
+            </a:r>
+          </a:p>
+        </p:txBody>
+      </p:sp>
+      <p:sp>
+        <p:nvSpPr>
+          <p:cNvPr id="34" name="TextBox 33"/>
+          <p:cNvSpPr txBox="1"/>
+          <p:nvPr/>
+        </p:nvSpPr>
+        <p:spPr>
+          <a:xfrm>
+            <a:off x="3337560" y="3017520"/>
+            <a:ext cx="2423160" cy="384048"/>
+          </a:xfrm>
+          <a:prstGeom prst="rect">
+            <a:avLst/>
+          </a:prstGeom>
+          <a:noFill/>
+        </p:spPr>
+        <p:txBody>
+          <a:bodyPr wrap="square" lIns="0" rIns="0" tIns="0" bIns="0">
+            <a:spAutoFit/>
+          </a:bodyPr>
+          <a:lstStyle/>
+          <a:p>
+            <a:pPr algn="l"/>
+            <a:r>
+              <a:rPr sz="1000" b="0" i="0">
+                <a:solidFill>
+                  <a:srgbClr val="FFFFFF"/>
+                </a:solidFill>
+                <a:latin typeface="Calibri"/>
+              </a:rPr>
+              <a:t>Catalog checks, checkpointed training, one command end to end</a:t>
+            </a:r>
+          </a:p>
+        </p:txBody>
+      </p:sp>
+      <p:sp>
+        <p:nvSpPr>
+          <p:cNvPr id="35" name="TextBox 34"/>
+          <p:cNvSpPr txBox="1"/>
+          <p:nvPr/>
+        </p:nvSpPr>
+        <p:spPr>
+          <a:xfrm>
+            <a:off x="3337560" y="3438144"/>
+            <a:ext cx="2423160" cy="292608"/>
+          </a:xfrm>
+          <a:prstGeom prst="rect">
+            <a:avLst/>
+          </a:prstGeom>
+          <a:noFill/>
+        </p:spPr>
+        <p:txBody>
+          <a:bodyPr wrap="square" lIns="0" rIns="0" tIns="0" bIns="0">
+            <a:spAutoFit/>
+          </a:bodyPr>
+          <a:lstStyle/>
+          <a:p>
+            <a:pPr algn="l"/>
+            <a:r>
+              <a:rPr sz="900" b="0" i="1">
+                <a:solidFill>
+                  <a:srgbClr val="8CAABF"/>
+                </a:solidFill>
+                <a:latin typeface="Calibri"/>
+              </a:rPr>
+              <a:t>A PC restart no longer costs a run</a:t>
+            </a:r>
+          </a:p>
+        </p:txBody>
+      </p:sp>
+      <p:sp>
+        <p:nvSpPr>
+          <p:cNvPr id="36" name="Card 6"/>
+          <p:cNvSpPr/>
+          <p:nvPr/>
+        </p:nvSpPr>
+        <p:spPr>
+          <a:xfrm>
+            <a:off x="6035040" y="2487168"/>
+            <a:ext cx="2697480" cy="1298448"/>
+          </a:xfrm>
+          <a:prstGeom prst="rect">
+            <a:avLst/>
+          </a:prstGeom>
+          <a:solidFill>
+            <a:srgbClr val="132140"/>
+          </a:solidFill>
+          <a:ln w="12700">
+            <a:solidFill>
+              <a:srgbClr val="2E4060"/>
+            </a:solidFill>
+          </a:ln>
+          <a:effectLst/>
+        </p:spPr>
+        <p:style>
+          <a:lnRef idx="1">
+            <a:schemeClr val="accent1"/>
+          </a:lnRef>
+          <a:fillRef idx="3">
+            <a:schemeClr val="accent1"/>
+          </a:fillRef>
+          <a:effectRef idx="2">
+            <a:schemeClr val="accent1"/>
+          </a:effectRef>
+          <a:fontRef idx="minor">
+            <a:schemeClr val="lt1"/>
+          </a:fontRef>
+        </p:style>
+        <p:txBody>
+          <a:bodyPr rtlCol="0" anchor="ctr"/>
+          <a:lstStyle/>
+          <a:p>
+            <a:pPr algn="ctr"/>
+          </a:p>
+        </p:txBody>
+      </p:sp>
+      <p:sp>
+        <p:nvSpPr>
+          <p:cNvPr id="37" name="Card 6 number"/>
+          <p:cNvSpPr/>
+          <p:nvPr/>
+        </p:nvSpPr>
+        <p:spPr>
+          <a:xfrm>
+            <a:off x="6172200" y="2624327"/>
+            <a:ext cx="292608" cy="292608"/>
+          </a:xfrm>
+          <a:prstGeom prst="ellipse">
+            <a:avLst/>
+          </a:prstGeom>
+          <a:solidFill>
+            <a:srgbClr val="3D9BE9"/>
+          </a:solidFill>
+          <a:ln>
+            <a:noFill/>
+          </a:ln>
+          <a:effectLst/>
+        </p:spPr>
+        <p:style>
+          <a:lnRef idx="1">
+            <a:schemeClr val="accent1"/>
+          </a:lnRef>
+          <a:fillRef idx="3">
+            <a:schemeClr val="accent1"/>
+          </a:fillRef>
+          <a:effectRef idx="2">
+            <a:schemeClr val="accent1"/>
+          </a:effectRef>
+          <a:fontRef idx="minor">
+            <a:schemeClr val="lt1"/>
+          </a:fontRef>
+        </p:style>
+        <p:txBody>
+          <a:bodyPr rtlCol="0" anchor="ctr"/>
+          <a:lstStyle/>
+          <a:p/>
+        </p:txBody>
+      </p:sp>
+      <p:sp>
+        <p:nvSpPr>
+          <p:cNvPr id="38" name="TextBox 37"/>
+          <p:cNvSpPr txBox="1"/>
+          <p:nvPr/>
+        </p:nvSpPr>
+        <p:spPr>
+          <a:xfrm>
+            <a:off x="6172200" y="2670048"/>
+            <a:ext cx="292608" cy="219456"/>
+          </a:xfrm>
+          <a:prstGeom prst="rect">
+            <a:avLst/>
+          </a:prstGeom>
+          <a:noFill/>
+        </p:spPr>
+        <p:txBody>
+          <a:bodyPr wrap="square" lIns="0" rIns="0" tIns="0" bIns="0">
+            <a:spAutoFit/>
+          </a:bodyPr>
+          <a:lstStyle/>
+          <a:p>
+            <a:pPr algn="ctr"/>
+            <a:r>
+              <a:rPr sz="1000" b="1" i="0">
+                <a:solidFill>
+                  <a:srgbClr val="0B1120"/>
+                </a:solidFill>
+                <a:latin typeface="Calibri"/>
+              </a:rPr>
+              <a:t>6</a:t>
+            </a:r>
+          </a:p>
+        </p:txBody>
+      </p:sp>
+      <p:sp>
+        <p:nvSpPr>
+          <p:cNvPr id="39" name="TextBox 38"/>
+          <p:cNvSpPr txBox="1"/>
+          <p:nvPr/>
+        </p:nvSpPr>
+        <p:spPr>
+          <a:xfrm>
+            <a:off x="6565392" y="2642615"/>
+            <a:ext cx="2057400" cy="274320"/>
+          </a:xfrm>
+          <a:prstGeom prst="rect">
+            <a:avLst/>
+          </a:prstGeom>
+          <a:noFill/>
+        </p:spPr>
+        <p:txBody>
+          <a:bodyPr wrap="square" lIns="0" rIns="0" tIns="0" bIns="0">
+            <a:spAutoFit/>
+          </a:bodyPr>
+          <a:lstStyle/>
+          <a:p>
+            <a:pPr algn="l"/>
+            <a:r>
+              <a:rPr sz="1200" b="1" i="0">
+                <a:solidFill>
+                  <a:srgbClr val="3D9BE9"/>
+                </a:solidFill>
+                <a:latin typeface="Calibri"/>
+              </a:rPr>
+              <a:t>Always fresh</a:t>
+            </a:r>
+          </a:p>
+        </p:txBody>
+      </p:sp>
+      <p:sp>
+        <p:nvSpPr>
+          <p:cNvPr id="40" name="TextBox 39"/>
+          <p:cNvSpPr txBox="1"/>
+          <p:nvPr/>
+        </p:nvSpPr>
+        <p:spPr>
+          <a:xfrm>
+            <a:off x="6172200" y="3017520"/>
+            <a:ext cx="2423160" cy="384048"/>
+          </a:xfrm>
+          <a:prstGeom prst="rect">
+            <a:avLst/>
+          </a:prstGeom>
+          <a:noFill/>
+        </p:spPr>
+        <p:txBody>
+          <a:bodyPr wrap="square" lIns="0" rIns="0" tIns="0" bIns="0">
+            <a:spAutoFit/>
+          </a:bodyPr>
+          <a:lstStyle/>
+          <a:p>
+            <a:pPr algn="l"/>
+            <a:r>
+              <a:rPr sz="1000" b="0" i="0">
+                <a:solidFill>
+                  <a:srgbClr val="FFFFFF"/>
+                </a:solidFill>
+                <a:latin typeface="Calibri"/>
+              </a:rPr>
+              <a:t>Monthly NASA / Gaia / JPL refresh as a pull request; weekly schema check</a:t>
+            </a:r>
+          </a:p>
+        </p:txBody>
+      </p:sp>
+      <p:sp>
+        <p:nvSpPr>
+          <p:cNvPr id="41" name="TextBox 40"/>
+          <p:cNvSpPr txBox="1"/>
+          <p:nvPr/>
+        </p:nvSpPr>
+        <p:spPr>
+          <a:xfrm>
+            <a:off x="6172200" y="3438144"/>
+            <a:ext cx="2423160" cy="292608"/>
+          </a:xfrm>
+          <a:prstGeom prst="rect">
+            <a:avLst/>
+          </a:prstGeom>
+          <a:noFill/>
+        </p:spPr>
+        <p:txBody>
+          <a:bodyPr wrap="square" lIns="0" rIns="0" tIns="0" bIns="0">
+            <a:spAutoFit/>
+          </a:bodyPr>
+          <a:lstStyle/>
+          <a:p>
+            <a:pPr algn="l"/>
+            <a:r>
+              <a:rPr sz="900" b="0" i="1">
+                <a:solidFill>
+                  <a:srgbClr val="8CAABF"/>
+                </a:solidFill>
+                <a:latin typeface="Calibri"/>
+              </a:rPr>
+              <a:t>Nothing merges without review</a:t>
+            </a:r>
+          </a:p>
+        </p:txBody>
+      </p:sp>
+      <p:sp>
+        <p:nvSpPr>
+          <p:cNvPr id="42" name="TextBox 41"/>
+          <p:cNvSpPr txBox="1"/>
+          <p:nvPr/>
+        </p:nvSpPr>
+        <p:spPr>
+          <a:xfrm>
+            <a:off x="365760" y="4023360"/>
+            <a:ext cx="8412480" cy="548640"/>
+          </a:xfrm>
+          <a:prstGeom prst="rect">
+            <a:avLst/>
+          </a:prstGeom>
+          <a:noFill/>
+        </p:spPr>
+        <p:txBody>
+          <a:bodyPr wrap="square" lIns="0" rIns="0" tIns="0" bIns="0">
+            <a:spAutoFit/>
+          </a:bodyPr>
+          <a:lstStyle/>
+          <a:p>
+            <a:pPr algn="l"/>
+            <a:r>
+              <a:rPr sz="1100" b="1" i="0">
+                <a:solidFill>
+                  <a:srgbClr val="F5C518"/>
+                </a:solidFill>
+                <a:latin typeface="Calibri"/>
+              </a:rPr>
+              <a:t>Lesson: </a:t>
+            </a:r>
+            <a:r>
+              <a:rPr sz="1100" b="0" i="0">
+                <a:solidFill>
+                  <a:srgbClr val="FFFFFF"/>
+                </a:solidFill>
+                <a:latin typeface="Calibri"/>
+              </a:rPr>
+              <a:t>treat a student project like production. Checks that run on every push caught real problems: colours some readers couldn't tell apart, a "transit" longer than its orbit, a canvas wiped in background tabs.</a:t>
+            </a:r>
+          </a:p>
+        </p:txBody>
+      </p:sp>
+    </p:spTree>
+  </p:cSld>
+  <p:clrMapOvr>
+    <a:masterClrMapping/>
+  </p:clrMapOvr>
+</p:sld>
+</file>
+
 <file path=ppt/slides/slide2.xml><?xml version="1.0" encoding="utf-8"?>
 <p:sld xmlns:a="http://schemas.openxmlformats.org/drawingml/2006/main" xmlns:r="http://schemas.openxmlformats.org/officeDocument/2006/relationships" xmlns:p="http://schemas.openxmlformats.org/presentationml/2006/main">
   <p:cSld name="Slide 2">
@@ -8995,6 +12033,10 @@
             <a:prstDash val="solid"/>
           </a:ln>
         </p:spPr>
+        <p:txBody>
+          <a:bodyPr/>
+          <a:p/>
+        </p:txBody>
       </p:sp>
       <p:sp>
         <p:nvSpPr>
@@ -9066,6 +12108,10 @@
             </a:outerShdw>
           </a:effectLst>
         </p:spPr>
+        <p:txBody>
+          <a:bodyPr/>
+          <a:p/>
+        </p:txBody>
       </p:sp>
       <p:sp>
         <p:nvSpPr>
@@ -9206,15 +12252,15 @@
               <a:buNone/>
             </a:pPr>
             <a:r>
-              <a:rPr lang="en-US" sz="900" i="1" dirty="0">
-                <a:solidFill>
-                  <a:srgbClr val="8CAABF"/>
+              <a:rPr lang="en-US" sz="1000" i="1" dirty="0">
+                <a:solidFill>
+                  <a:srgbClr val="FFFFFF"/>
                 </a:solidFill>
                 <a:latin typeface="Calibri" pitchFamily="34" charset="0"/>
                 <a:ea typeface="Calibri" pitchFamily="34" charset="-122"/>
                 <a:cs typeface="Calibri" pitchFamily="34" charset="-120"/>
               </a:rPr>
-              <a:t>See notebook output</a:t>
+              <a:t>V3: 97.2%   (V1.5: 70.4%)</a:t>
             </a:r>
             <a:endParaRPr lang="en-US" sz="900" dirty="0"/>
           </a:p>
@@ -9251,6 +12297,10 @@
             </a:outerShdw>
           </a:effectLst>
         </p:spPr>
+        <p:txBody>
+          <a:bodyPr/>
+          <a:p/>
+        </p:txBody>
       </p:sp>
       <p:sp>
         <p:nvSpPr>
@@ -9391,15 +12441,15 @@
               <a:buNone/>
             </a:pPr>
             <a:r>
-              <a:rPr lang="en-US" sz="900" i="1" dirty="0">
-                <a:solidFill>
-                  <a:srgbClr val="8CAABF"/>
+              <a:rPr lang="en-US" sz="1000" i="1" dirty="0">
+                <a:solidFill>
+                  <a:srgbClr val="FFFFFF"/>
                 </a:solidFill>
                 <a:latin typeface="Calibri" pitchFamily="34" charset="0"/>
                 <a:ea typeface="Calibri" pitchFamily="34" charset="-122"/>
                 <a:cs typeface="Calibri" pitchFamily="34" charset="-120"/>
               </a:rPr>
-              <a:t>See notebook output</a:t>
+              <a:t>V3: 0.994   (V1.5: 0.771)</a:t>
             </a:r>
             <a:endParaRPr lang="en-US" sz="900" dirty="0"/>
           </a:p>
@@ -9436,6 +12486,10 @@
             </a:outerShdw>
           </a:effectLst>
         </p:spPr>
+        <p:txBody>
+          <a:bodyPr/>
+          <a:p/>
+        </p:txBody>
       </p:sp>
       <p:sp>
         <p:nvSpPr>
@@ -9576,15 +12630,15 @@
               <a:buNone/>
             </a:pPr>
             <a:r>
-              <a:rPr lang="en-US" sz="900" i="1" dirty="0">
-                <a:solidFill>
-                  <a:srgbClr val="8CAABF"/>
+              <a:rPr lang="en-US" sz="1000" i="1" dirty="0">
+                <a:solidFill>
+                  <a:srgbClr val="FFFFFF"/>
                 </a:solidFill>
                 <a:latin typeface="Calibri" pitchFamily="34" charset="0"/>
                 <a:ea typeface="Calibri" pitchFamily="34" charset="-122"/>
                 <a:cs typeface="Calibri" pitchFamily="34" charset="-120"/>
               </a:rPr>
-              <a:t>See notebook output</a:t>
+              <a:t>V3: 95.7%   (V1.5: 72.7%)</a:t>
             </a:r>
             <a:endParaRPr lang="en-US" sz="900" dirty="0"/>
           </a:p>
@@ -9621,6 +12675,10 @@
             </a:outerShdw>
           </a:effectLst>
         </p:spPr>
+        <p:txBody>
+          <a:bodyPr/>
+          <a:p/>
+        </p:txBody>
       </p:sp>
       <p:sp>
         <p:nvSpPr>
@@ -9761,15 +12819,15 @@
               <a:buNone/>
             </a:pPr>
             <a:r>
-              <a:rPr lang="en-US" sz="900" i="1" dirty="0">
-                <a:solidFill>
-                  <a:srgbClr val="8CAABF"/>
+              <a:rPr lang="en-US" sz="1000" i="1" dirty="0">
+                <a:solidFill>
+                  <a:srgbClr val="FFFFFF"/>
                 </a:solidFill>
                 <a:latin typeface="Calibri" pitchFamily="34" charset="0"/>
                 <a:ea typeface="Calibri" pitchFamily="34" charset="-122"/>
                 <a:cs typeface="Calibri" pitchFamily="34" charset="-120"/>
               </a:rPr>
-              <a:t>See notebook output</a:t>
+              <a:t>V3: 96.7%   (V1.5: 73.6%)</a:t>
             </a:r>
             <a:endParaRPr lang="en-US" sz="900" dirty="0"/>
           </a:p>
@@ -9838,6 +12896,10 @@
             <a:prstDash val="solid"/>
           </a:ln>
         </p:spPr>
+        <p:txBody>
+          <a:bodyPr/>
+          <a:p/>
+        </p:txBody>
       </p:sp>
       <p:sp>
         <p:nvSpPr>
@@ -9941,6 +13003,10 @@
             <a:prstDash val="solid"/>
           </a:ln>
         </p:spPr>
+        <p:txBody>
+          <a:bodyPr/>
+          <a:p/>
+        </p:txBody>
       </p:sp>
       <p:sp>
         <p:nvSpPr>
@@ -10044,6 +13110,10 @@
             <a:prstDash val="solid"/>
           </a:ln>
         </p:spPr>
+        <p:txBody>
+          <a:bodyPr/>
+          <a:p/>
+        </p:txBody>
       </p:sp>
       <p:sp>
         <p:nvSpPr>
@@ -10147,6 +13217,10 @@
             <a:prstDash val="solid"/>
           </a:ln>
         </p:spPr>
+        <p:txBody>
+          <a:bodyPr/>
+          <a:p/>
+        </p:txBody>
       </p:sp>
       <p:sp>
         <p:nvSpPr>
@@ -10250,6 +13324,10 @@
             <a:prstDash val="solid"/>
           </a:ln>
         </p:spPr>
+        <p:txBody>
+          <a:bodyPr/>
+          <a:p/>
+        </p:txBody>
       </p:sp>
       <p:sp>
         <p:nvSpPr>
@@ -10353,6 +13431,10 @@
             <a:prstDash val="solid"/>
           </a:ln>
         </p:spPr>
+        <p:txBody>
+          <a:bodyPr/>
+          <a:p/>
+        </p:txBody>
       </p:sp>
       <p:sp>
         <p:nvSpPr>
@@ -11543,6 +14625,10 @@
             <a:prstDash val="solid"/>
           </a:ln>
         </p:spPr>
+        <p:txBody>
+          <a:bodyPr/>
+          <a:p/>
+        </p:txBody>
       </p:sp>
       <p:sp>
         <p:nvSpPr>
@@ -11572,6 +14658,10 @@
             <a:prstDash val="solid"/>
           </a:ln>
         </p:spPr>
+        <p:txBody>
+          <a:bodyPr/>
+          <a:p/>
+        </p:txBody>
       </p:sp>
       <p:sp>
         <p:nvSpPr>
@@ -11601,6 +14691,10 @@
             <a:prstDash val="solid"/>
           </a:ln>
         </p:spPr>
+        <p:txBody>
+          <a:bodyPr/>
+          <a:p/>
+        </p:txBody>
       </p:sp>
       <p:sp>
         <p:nvSpPr>
@@ -11630,6 +14724,10 @@
             <a:prstDash val="solid"/>
           </a:ln>
         </p:spPr>
+        <p:txBody>
+          <a:bodyPr/>
+          <a:p/>
+        </p:txBody>
       </p:sp>
       <p:sp>
         <p:nvSpPr>
@@ -11659,6 +14757,10 @@
             <a:prstDash val="solid"/>
           </a:ln>
         </p:spPr>
+        <p:txBody>
+          <a:bodyPr/>
+          <a:p/>
+        </p:txBody>
       </p:sp>
       <p:sp>
         <p:nvSpPr>
@@ -11688,6 +14790,10 @@
             <a:prstDash val="solid"/>
           </a:ln>
         </p:spPr>
+        <p:txBody>
+          <a:bodyPr/>
+          <a:p/>
+        </p:txBody>
       </p:sp>
       <p:sp>
         <p:nvSpPr>
@@ -11717,6 +14823,10 @@
             <a:prstDash val="solid"/>
           </a:ln>
         </p:spPr>
+        <p:txBody>
+          <a:bodyPr/>
+          <a:p/>
+        </p:txBody>
       </p:sp>
       <p:sp>
         <p:nvSpPr>
@@ -11746,6 +14856,10 @@
             <a:prstDash val="solid"/>
           </a:ln>
         </p:spPr>
+        <p:txBody>
+          <a:bodyPr/>
+          <a:p/>
+        </p:txBody>
       </p:sp>
       <p:sp>
         <p:nvSpPr>
@@ -11775,6 +14889,10 @@
             <a:prstDash val="solid"/>
           </a:ln>
         </p:spPr>
+        <p:txBody>
+          <a:bodyPr/>
+          <a:p/>
+        </p:txBody>
       </p:sp>
       <p:sp>
         <p:nvSpPr>
@@ -11804,6 +14922,10 @@
             <a:prstDash val="solid"/>
           </a:ln>
         </p:spPr>
+        <p:txBody>
+          <a:bodyPr/>
+          <a:p/>
+        </p:txBody>
       </p:sp>
       <p:sp>
         <p:nvSpPr>
@@ -11833,6 +14955,10 @@
             <a:prstDash val="solid"/>
           </a:ln>
         </p:spPr>
+        <p:txBody>
+          <a:bodyPr/>
+          <a:p/>
+        </p:txBody>
       </p:sp>
       <p:sp>
         <p:nvSpPr>
@@ -11862,6 +14988,10 @@
             <a:prstDash val="solid"/>
           </a:ln>
         </p:spPr>
+        <p:txBody>
+          <a:bodyPr/>
+          <a:p/>
+        </p:txBody>
       </p:sp>
       <p:sp>
         <p:nvSpPr>
@@ -11891,6 +15021,10 @@
             <a:prstDash val="solid"/>
           </a:ln>
         </p:spPr>
+        <p:txBody>
+          <a:bodyPr/>
+          <a:p/>
+        </p:txBody>
       </p:sp>
       <p:sp>
         <p:nvSpPr>
@@ -11920,6 +15054,10 @@
             <a:prstDash val="solid"/>
           </a:ln>
         </p:spPr>
+        <p:txBody>
+          <a:bodyPr/>
+          <a:p/>
+        </p:txBody>
       </p:sp>
       <p:sp>
         <p:nvSpPr>
@@ -11949,6 +15087,10 @@
             <a:prstDash val="solid"/>
           </a:ln>
         </p:spPr>
+        <p:txBody>
+          <a:bodyPr/>
+          <a:p/>
+        </p:txBody>
       </p:sp>
       <p:sp>
         <p:nvSpPr>
@@ -11978,6 +15120,10 @@
             <a:prstDash val="solid"/>
           </a:ln>
         </p:spPr>
+        <p:txBody>
+          <a:bodyPr/>
+          <a:p/>
+        </p:txBody>
       </p:sp>
       <p:sp>
         <p:nvSpPr>
@@ -12007,6 +15153,10 @@
             <a:prstDash val="solid"/>
           </a:ln>
         </p:spPr>
+        <p:txBody>
+          <a:bodyPr/>
+          <a:p/>
+        </p:txBody>
       </p:sp>
       <p:sp>
         <p:nvSpPr>
@@ -12036,6 +15186,10 @@
             <a:prstDash val="solid"/>
           </a:ln>
         </p:spPr>
+        <p:txBody>
+          <a:bodyPr/>
+          <a:p/>
+        </p:txBody>
       </p:sp>
       <p:sp>
         <p:nvSpPr>
@@ -12065,6 +15219,10 @@
             <a:prstDash val="solid"/>
           </a:ln>
         </p:spPr>
+        <p:txBody>
+          <a:bodyPr/>
+          <a:p/>
+        </p:txBody>
       </p:sp>
       <p:sp>
         <p:nvSpPr>
@@ -12094,6 +15252,10 @@
             <a:prstDash val="solid"/>
           </a:ln>
         </p:spPr>
+        <p:txBody>
+          <a:bodyPr/>
+          <a:p/>
+        </p:txBody>
       </p:sp>
       <p:sp>
         <p:nvSpPr>
@@ -12123,6 +15285,10 @@
             <a:prstDash val="solid"/>
           </a:ln>
         </p:spPr>
+        <p:txBody>
+          <a:bodyPr/>
+          <a:p/>
+        </p:txBody>
       </p:sp>
       <p:sp>
         <p:nvSpPr>
@@ -12152,6 +15318,10 @@
             <a:prstDash val="solid"/>
           </a:ln>
         </p:spPr>
+        <p:txBody>
+          <a:bodyPr/>
+          <a:p/>
+        </p:txBody>
       </p:sp>
       <p:sp>
         <p:nvSpPr>
@@ -12181,6 +15351,10 @@
             <a:prstDash val="solid"/>
           </a:ln>
         </p:spPr>
+        <p:txBody>
+          <a:bodyPr/>
+          <a:p/>
+        </p:txBody>
       </p:sp>
       <p:sp>
         <p:nvSpPr>
@@ -12210,6 +15384,10 @@
             <a:prstDash val="solid"/>
           </a:ln>
         </p:spPr>
+        <p:txBody>
+          <a:bodyPr/>
+          <a:p/>
+        </p:txBody>
       </p:sp>
       <p:sp>
         <p:nvSpPr>
@@ -12239,6 +15417,10 @@
             <a:prstDash val="solid"/>
           </a:ln>
         </p:spPr>
+        <p:txBody>
+          <a:bodyPr/>
+          <a:p/>
+        </p:txBody>
       </p:sp>
       <p:sp>
         <p:nvSpPr>
@@ -12268,6 +15450,10 @@
             <a:prstDash val="solid"/>
           </a:ln>
         </p:spPr>
+        <p:txBody>
+          <a:bodyPr/>
+          <a:p/>
+        </p:txBody>
       </p:sp>
       <p:sp>
         <p:nvSpPr>
@@ -12297,6 +15483,10 @@
             <a:prstDash val="solid"/>
           </a:ln>
         </p:spPr>
+        <p:txBody>
+          <a:bodyPr/>
+          <a:p/>
+        </p:txBody>
       </p:sp>
       <p:sp>
         <p:nvSpPr>
@@ -12326,6 +15516,10 @@
             <a:prstDash val="solid"/>
           </a:ln>
         </p:spPr>
+        <p:txBody>
+          <a:bodyPr/>
+          <a:p/>
+        </p:txBody>
       </p:sp>
       <p:sp>
         <p:nvSpPr>
@@ -12355,6 +15549,10 @@
             <a:prstDash val="solid"/>
           </a:ln>
         </p:spPr>
+        <p:txBody>
+          <a:bodyPr/>
+          <a:p/>
+        </p:txBody>
       </p:sp>
       <p:sp>
         <p:nvSpPr>
@@ -12384,6 +15582,10 @@
             <a:prstDash val="solid"/>
           </a:ln>
         </p:spPr>
+        <p:txBody>
+          <a:bodyPr/>
+          <a:p/>
+        </p:txBody>
       </p:sp>
       <p:sp>
         <p:nvSpPr>
@@ -12413,6 +15615,10 @@
             <a:prstDash val="solid"/>
           </a:ln>
         </p:spPr>
+        <p:txBody>
+          <a:bodyPr/>
+          <a:p/>
+        </p:txBody>
       </p:sp>
       <p:sp>
         <p:nvSpPr>
@@ -12442,6 +15648,10 @@
             <a:prstDash val="solid"/>
           </a:ln>
         </p:spPr>
+        <p:txBody>
+          <a:bodyPr/>
+          <a:p/>
+        </p:txBody>
       </p:sp>
       <p:sp>
         <p:nvSpPr>
@@ -12471,6 +15681,10 @@
             <a:prstDash val="solid"/>
           </a:ln>
         </p:spPr>
+        <p:txBody>
+          <a:bodyPr/>
+          <a:p/>
+        </p:txBody>
       </p:sp>
       <p:sp>
         <p:nvSpPr>
@@ -12500,6 +15714,10 @@
             <a:prstDash val="solid"/>
           </a:ln>
         </p:spPr>
+        <p:txBody>
+          <a:bodyPr/>
+          <a:p/>
+        </p:txBody>
       </p:sp>
       <p:sp>
         <p:nvSpPr>
@@ -12529,6 +15747,10 @@
             <a:prstDash val="solid"/>
           </a:ln>
         </p:spPr>
+        <p:txBody>
+          <a:bodyPr/>
+          <a:p/>
+        </p:txBody>
       </p:sp>
       <p:sp>
         <p:nvSpPr>
@@ -12558,6 +15780,10 @@
             <a:prstDash val="solid"/>
           </a:ln>
         </p:spPr>
+        <p:txBody>
+          <a:bodyPr/>
+          <a:p/>
+        </p:txBody>
       </p:sp>
       <p:sp>
         <p:nvSpPr>
@@ -12587,6 +15813,10 @@
             <a:prstDash val="solid"/>
           </a:ln>
         </p:spPr>
+        <p:txBody>
+          <a:bodyPr/>
+          <a:p/>
+        </p:txBody>
       </p:sp>
       <p:sp>
         <p:nvSpPr>
@@ -12616,6 +15846,10 @@
             <a:prstDash val="solid"/>
           </a:ln>
         </p:spPr>
+        <p:txBody>
+          <a:bodyPr/>
+          <a:p/>
+        </p:txBody>
       </p:sp>
       <p:sp>
         <p:nvSpPr>
@@ -12645,6 +15879,10 @@
             <a:prstDash val="solid"/>
           </a:ln>
         </p:spPr>
+        <p:txBody>
+          <a:bodyPr/>
+          <a:p/>
+        </p:txBody>
       </p:sp>
       <p:sp>
         <p:nvSpPr>
@@ -12674,6 +15912,10 @@
             <a:prstDash val="solid"/>
           </a:ln>
         </p:spPr>
+        <p:txBody>
+          <a:bodyPr/>
+          <a:p/>
+        </p:txBody>
       </p:sp>
       <p:sp>
         <p:nvSpPr>
@@ -12699,6 +15941,10 @@
             <a:prstDash val="solid"/>
           </a:ln>
         </p:spPr>
+        <p:txBody>
+          <a:bodyPr/>
+          <a:p/>
+        </p:txBody>
       </p:sp>
       <p:sp>
         <p:nvSpPr>
@@ -12802,6 +16048,10 @@
             <a:prstDash val="solid"/>
           </a:ln>
         </p:spPr>
+        <p:txBody>
+          <a:bodyPr/>
+          <a:p/>
+        </p:txBody>
       </p:sp>
       <p:sp>
         <p:nvSpPr>
@@ -12866,6 +16116,10 @@
             <a:prstDash val="solid"/>
           </a:ln>
         </p:spPr>
+        <p:txBody>
+          <a:bodyPr/>
+          <a:p/>
+        </p:txBody>
       </p:sp>
       <p:sp>
         <p:nvSpPr>
@@ -12900,7 +16154,7 @@
                 <a:ea typeface="Calibri" pitchFamily="34" charset="-122"/>
                 <a:cs typeface="Calibri" pitchFamily="34" charset="-120"/>
               </a:rPr>
-              <a:t>Google Drive checkpointing is essential for long Colab jobs</a:t>
+              <a:t>Checkpoint long jobs: resume after a timeout or restart, never start over</a:t>
             </a:r>
             <a:endParaRPr lang="en-US" sz="1100" dirty="0"/>
           </a:p>
@@ -12930,6 +16184,10 @@
             <a:prstDash val="solid"/>
           </a:ln>
         </p:spPr>
+        <p:txBody>
+          <a:bodyPr/>
+          <a:p/>
+        </p:txBody>
       </p:sp>
       <p:sp>
         <p:nvSpPr>
@@ -12994,6 +16252,10 @@
             <a:prstDash val="solid"/>
           </a:ln>
         </p:spPr>
+        <p:txBody>
+          <a:bodyPr/>
+          <a:p/>
+        </p:txBody>
       </p:sp>
       <p:sp>
         <p:nvSpPr>
@@ -13058,6 +16320,10 @@
             <a:prstDash val="solid"/>
           </a:ln>
         </p:spPr>
+        <p:txBody>
+          <a:bodyPr/>
+          <a:p/>
+        </p:txBody>
       </p:sp>
       <p:sp>
         <p:nvSpPr>
@@ -13120,6 +16386,10 @@
             <a:prstDash val="solid"/>
           </a:ln>
         </p:spPr>
+        <p:txBody>
+          <a:bodyPr/>
+          <a:p/>
+        </p:txBody>
       </p:sp>
       <p:sp>
         <p:nvSpPr>
@@ -13184,6 +16454,10 @@
             <a:prstDash val="solid"/>
           </a:ln>
         </p:spPr>
+        <p:txBody>
+          <a:bodyPr/>
+          <a:p/>
+        </p:txBody>
       </p:sp>
       <p:sp>
         <p:nvSpPr>
@@ -13257,7 +16531,7 @@
                 <a:ea typeface="Calibri" pitchFamily="34" charset="-122"/>
                 <a:cs typeface="Calibri" pitchFamily="34" charset="-120"/>
               </a:rPr>
-              <a:t>Scale to full dataset</a:t>
+              <a:t>Cross-validation &amp; scoreboard</a:t>
             </a:r>
             <a:endParaRPr lang="en-US" sz="1100" dirty="0"/>
           </a:p>
@@ -13296,7 +16570,7 @@
                 <a:ea typeface="Calibri" pitchFamily="34" charset="-122"/>
                 <a:cs typeface="Calibri" pitchFamily="34" charset="-120"/>
               </a:rPr>
-              <a:t>Use all ~9,000 KOIs instead of 1,000 for better coverage</a:t>
+              <a:t>5 grouped folds; check predictions as NASA decides candidates</a:t>
             </a:r>
             <a:endParaRPr lang="en-US" sz="1000" dirty="0"/>
           </a:p>
@@ -13326,6 +16600,10 @@
             <a:prstDash val="solid"/>
           </a:ln>
         </p:spPr>
+        <p:txBody>
+          <a:bodyPr/>
+          <a:p/>
+        </p:txBody>
       </p:sp>
       <p:sp>
         <p:nvSpPr>
@@ -13399,7 +16677,7 @@
                 <a:ea typeface="Calibri" pitchFamily="34" charset="-122"/>
                 <a:cs typeface="Calibri" pitchFamily="34" charset="-120"/>
               </a:rPr>
-              <a:t>Global + Local views</a:t>
+              <a:t>TESS transfer test</a:t>
             </a:r>
             <a:endParaRPr lang="en-US" sz="1100" dirty="0"/>
           </a:p>
@@ -13438,7 +16716,7 @@
                 <a:ea typeface="Calibri" pitchFamily="34" charset="-122"/>
                 <a:cs typeface="Calibri" pitchFamily="34" charset="-120"/>
               </a:rPr>
-              <a:t>Add two-branch network (Shallue &amp; Vanderburg 2018) for higher precision</a:t>
+              <a:t>Score Kepler planets TESS re-observed, using TESS light curves</a:t>
             </a:r>
             <a:endParaRPr lang="en-US" sz="1000" dirty="0"/>
           </a:p>
@@ -13468,6 +16746,10 @@
             <a:prstDash val="solid"/>
           </a:ln>
         </p:spPr>
+        <p:txBody>
+          <a:bodyPr/>
+          <a:p/>
+        </p:txBody>
       </p:sp>
       <p:sp>
         <p:nvSpPr>
@@ -13541,7 +16823,7 @@
                 <a:ea typeface="Calibri" pitchFamily="34" charset="-122"/>
                 <a:cs typeface="Calibri" pitchFamily="34" charset="-120"/>
               </a:rPr>
-              <a:t>Hyperparameter tuning</a:t>
+              <a:t>Gaia stellar features</a:t>
             </a:r>
             <a:endParaRPr lang="en-US" sz="1100" dirty="0"/>
           </a:p>
@@ -13580,7 +16862,7 @@
                 <a:ea typeface="Calibri" pitchFamily="34" charset="-122"/>
                 <a:cs typeface="Calibri" pitchFamily="34" charset="-120"/>
               </a:rPr>
-              <a:t>Keras Tuner to optimize filter sizes, learning rate, dropout</a:t>
+              <a:t>Ablation: do Gaia radii, masses and ages help?</a:t>
             </a:r>
             <a:endParaRPr lang="en-US" sz="1000" dirty="0"/>
           </a:p>
@@ -13610,6 +16892,10 @@
             <a:prstDash val="solid"/>
           </a:ln>
         </p:spPr>
+        <p:txBody>
+          <a:bodyPr/>
+          <a:p/>
+        </p:txBody>
       </p:sp>
       <p:sp>
         <p:nvSpPr>
@@ -13683,7 +16969,7 @@
                 <a:ea typeface="Calibri" pitchFamily="34" charset="-122"/>
                 <a:cs typeface="Calibri" pitchFamily="34" charset="-120"/>
               </a:rPr>
-              <a:t>TESS mission data</a:t>
+              <a:t>Real transit sparklines</a:t>
             </a:r>
             <a:endParaRPr lang="en-US" sz="1100" dirty="0"/>
           </a:p>
@@ -13722,7 +17008,7 @@
                 <a:ea typeface="Calibri" pitchFamily="34" charset="-122"/>
                 <a:cs typeface="Calibri" pitchFamily="34" charset="-120"/>
               </a:rPr>
-              <a:t>Apply the same pipeline to newer TESS light curves via lightkurve</a:t>
+              <a:t>Each planet's own folded Kepler light curve on the map</a:t>
             </a:r>
             <a:endParaRPr lang="en-US" sz="1000" dirty="0"/>
           </a:p>
@@ -13752,6 +17038,10 @@
             <a:prstDash val="solid"/>
           </a:ln>
         </p:spPr>
+        <p:txBody>
+          <a:bodyPr/>
+          <a:p/>
+        </p:txBody>
       </p:sp>
       <p:sp>
         <p:nvSpPr>
@@ -13825,7 +17115,7 @@
                 <a:ea typeface="Calibri" pitchFamily="34" charset="-122"/>
                 <a:cs typeface="Calibri" pitchFamily="34" charset="-120"/>
               </a:rPr>
-              <a:t>Deploy the Gradio app</a:t>
+              <a:t>Public demo</a:t>
             </a:r>
             <a:endParaRPr lang="en-US" sz="1100" dirty="0"/>
           </a:p>
@@ -13864,7 +17154,7 @@
                 <a:ea typeface="Calibri" pitchFamily="34" charset="-122"/>
                 <a:cs typeface="Calibri" pitchFamily="34" charset="-120"/>
               </a:rPr>
-              <a:t>Host on Hugging Face Spaces for public access</a:t>
+              <a:t>Gradio app on Hugging Face Spaces (encrypted model)</a:t>
             </a:r>
             <a:endParaRPr lang="en-US" sz="1000" dirty="0"/>
           </a:p>
@@ -13894,6 +17184,10 @@
             <a:prstDash val="solid"/>
           </a:ln>
         </p:spPr>
+        <p:txBody>
+          <a:bodyPr/>
+          <a:p/>
+        </p:txBody>
       </p:sp>
       <p:sp>
         <p:nvSpPr>
@@ -13979,6 +17273,1884 @@
               <a:t>github.com/med27-coder</a:t>
             </a:r>
             <a:endParaRPr lang="en-US" sz="1000" dirty="0"/>
+          </a:p>
+        </p:txBody>
+      </p:sp>
+    </p:spTree>
+  </p:cSld>
+  <p:clrMapOvr>
+    <a:masterClrMapping/>
+  </p:clrMapOvr>
+</p:sld>
+</file>
+
+<file path=ppt/slides/slide9.xml><?xml version="1.0" encoding="utf-8"?>
+<p:sld xmlns:a="http://schemas.openxmlformats.org/drawingml/2006/main" xmlns:p="http://schemas.openxmlformats.org/presentationml/2006/main" xmlns:r="http://schemas.openxmlformats.org/officeDocument/2006/relationships">
+  <p:cSld>
+    <p:bg>
+      <p:bgPr>
+        <a:solidFill>
+          <a:srgbClr val="0B1120"/>
+        </a:solidFill>
+        <a:effectLst/>
+      </p:bgPr>
+    </p:bg>
+    <p:spTree>
+      <p:nvGrpSpPr>
+        <p:cNvPr id="1" name=""/>
+        <p:cNvGrpSpPr/>
+        <p:nvPr/>
+      </p:nvGrpSpPr>
+      <p:grpSpPr/>
+      <p:sp>
+        <p:nvSpPr>
+          <p:cNvPr id="2" name="Header band"/>
+          <p:cNvSpPr/>
+          <p:nvPr/>
+        </p:nvSpPr>
+        <p:spPr>
+          <a:xfrm>
+            <a:off x="0" y="0"/>
+            <a:ext cx="9144000" cy="1005840"/>
+          </a:xfrm>
+          <a:prstGeom prst="rect">
+            <a:avLst/>
+          </a:prstGeom>
+          <a:solidFill>
+            <a:srgbClr val="0F1E3C"/>
+          </a:solidFill>
+          <a:ln>
+            <a:noFill/>
+          </a:ln>
+          <a:effectLst/>
+        </p:spPr>
+        <p:style>
+          <a:lnRef idx="1">
+            <a:schemeClr val="accent1"/>
+          </a:lnRef>
+          <a:fillRef idx="3">
+            <a:schemeClr val="accent1"/>
+          </a:fillRef>
+          <a:effectRef idx="2">
+            <a:schemeClr val="accent1"/>
+          </a:effectRef>
+          <a:fontRef idx="minor">
+            <a:schemeClr val="lt1"/>
+          </a:fontRef>
+        </p:style>
+        <p:txBody>
+          <a:bodyPr rtlCol="0" anchor="ctr"/>
+          <a:lstStyle/>
+          <a:p>
+            <a:pPr algn="ctr"/>
+          </a:p>
+        </p:txBody>
+      </p:sp>
+      <p:sp>
+        <p:nvSpPr>
+          <p:cNvPr id="3" name="Title"/>
+          <p:cNvSpPr txBox="1"/>
+          <p:nvPr/>
+        </p:nvSpPr>
+        <p:spPr>
+          <a:xfrm>
+            <a:off x="457200" y="256032"/>
+            <a:ext cx="6583680" cy="548640"/>
+          </a:xfrm>
+          <a:prstGeom prst="rect">
+            <a:avLst/>
+          </a:prstGeom>
+          <a:noFill/>
+        </p:spPr>
+        <p:txBody>
+          <a:bodyPr wrap="square" lIns="0" rIns="0" tIns="0" bIns="0">
+            <a:spAutoFit/>
+          </a:bodyPr>
+          <a:lstStyle/>
+          <a:p>
+            <a:pPr algn="l"/>
+            <a:r>
+              <a:rPr sz="2800" b="1" i="0">
+                <a:solidFill>
+                  <a:srgbClr val="FFFFFF"/>
+                </a:solidFill>
+                <a:latin typeface="Calibri"/>
+              </a:rPr>
+              <a:t>Version 3  —  Star Gazer</a:t>
+            </a:r>
+          </a:p>
+        </p:txBody>
+      </p:sp>
+      <p:sp>
+        <p:nvSpPr>
+          <p:cNvPr id="4" name="Badge"/>
+          <p:cNvSpPr/>
+          <p:nvPr/>
+        </p:nvSpPr>
+        <p:spPr>
+          <a:xfrm>
+            <a:off x="7132320" y="228600"/>
+            <a:ext cx="1645920" cy="548640"/>
+          </a:xfrm>
+          <a:prstGeom prst="rect">
+            <a:avLst/>
+          </a:prstGeom>
+          <a:solidFill>
+            <a:srgbClr val="0F1E3C"/>
+          </a:solidFill>
+          <a:ln w="12700">
+            <a:solidFill>
+              <a:srgbClr val="0AADA4"/>
+            </a:solidFill>
+          </a:ln>
+          <a:effectLst/>
+        </p:spPr>
+        <p:style>
+          <a:lnRef idx="1">
+            <a:schemeClr val="accent1"/>
+          </a:lnRef>
+          <a:fillRef idx="3">
+            <a:schemeClr val="accent1"/>
+          </a:fillRef>
+          <a:effectRef idx="2">
+            <a:schemeClr val="accent1"/>
+          </a:effectRef>
+          <a:fontRef idx="minor">
+            <a:schemeClr val="lt1"/>
+          </a:fontRef>
+        </p:style>
+        <p:txBody>
+          <a:bodyPr rtlCol="0" anchor="ctr"/>
+          <a:lstStyle/>
+          <a:p>
+            <a:pPr algn="ctr"/>
+          </a:p>
+        </p:txBody>
+      </p:sp>
+      <p:sp>
+        <p:nvSpPr>
+          <p:cNvPr id="5" name="TextBox 4"/>
+          <p:cNvSpPr txBox="1"/>
+          <p:nvPr/>
+        </p:nvSpPr>
+        <p:spPr>
+          <a:xfrm>
+            <a:off x="7132320" y="393192"/>
+            <a:ext cx="1645920" cy="274320"/>
+          </a:xfrm>
+          <a:prstGeom prst="rect">
+            <a:avLst/>
+          </a:prstGeom>
+          <a:noFill/>
+        </p:spPr>
+        <p:txBody>
+          <a:bodyPr wrap="square" lIns="0" rIns="0" tIns="0" bIns="0">
+            <a:spAutoFit/>
+          </a:bodyPr>
+          <a:lstStyle/>
+          <a:p>
+            <a:pPr algn="ctr"/>
+            <a:r>
+              <a:rPr sz="1000" b="1" i="0">
+                <a:solidFill>
+                  <a:srgbClr val="0AADA4"/>
+                </a:solidFill>
+                <a:latin typeface="Calibri"/>
+              </a:rPr>
+              <a:t>V3  /  Star Gazer</a:t>
+            </a:r>
+          </a:p>
+        </p:txBody>
+      </p:sp>
+      <p:sp>
+        <p:nvSpPr>
+          <p:cNvPr id="6" name="Card 1"/>
+          <p:cNvSpPr/>
+          <p:nvPr/>
+        </p:nvSpPr>
+        <p:spPr>
+          <a:xfrm>
+            <a:off x="365760" y="1115568"/>
+            <a:ext cx="2697480" cy="1298448"/>
+          </a:xfrm>
+          <a:prstGeom prst="rect">
+            <a:avLst/>
+          </a:prstGeom>
+          <a:solidFill>
+            <a:srgbClr val="132140"/>
+          </a:solidFill>
+          <a:ln w="12700">
+            <a:solidFill>
+              <a:srgbClr val="2E4060"/>
+            </a:solidFill>
+          </a:ln>
+          <a:effectLst/>
+        </p:spPr>
+        <p:style>
+          <a:lnRef idx="1">
+            <a:schemeClr val="accent1"/>
+          </a:lnRef>
+          <a:fillRef idx="3">
+            <a:schemeClr val="accent1"/>
+          </a:fillRef>
+          <a:effectRef idx="2">
+            <a:schemeClr val="accent1"/>
+          </a:effectRef>
+          <a:fontRef idx="minor">
+            <a:schemeClr val="lt1"/>
+          </a:fontRef>
+        </p:style>
+        <p:txBody>
+          <a:bodyPr rtlCol="0" anchor="ctr"/>
+          <a:lstStyle/>
+          <a:p>
+            <a:pPr algn="ctr"/>
+          </a:p>
+        </p:txBody>
+      </p:sp>
+      <p:sp>
+        <p:nvSpPr>
+          <p:cNvPr id="7" name="Card 1 number"/>
+          <p:cNvSpPr/>
+          <p:nvPr/>
+        </p:nvSpPr>
+        <p:spPr>
+          <a:xfrm>
+            <a:off x="502920" y="1252728"/>
+            <a:ext cx="292608" cy="292608"/>
+          </a:xfrm>
+          <a:prstGeom prst="ellipse">
+            <a:avLst/>
+          </a:prstGeom>
+          <a:solidFill>
+            <a:srgbClr val="0AADA4"/>
+          </a:solidFill>
+          <a:ln>
+            <a:noFill/>
+          </a:ln>
+          <a:effectLst/>
+        </p:spPr>
+        <p:style>
+          <a:lnRef idx="1">
+            <a:schemeClr val="accent1"/>
+          </a:lnRef>
+          <a:fillRef idx="3">
+            <a:schemeClr val="accent1"/>
+          </a:fillRef>
+          <a:effectRef idx="2">
+            <a:schemeClr val="accent1"/>
+          </a:effectRef>
+          <a:fontRef idx="minor">
+            <a:schemeClr val="lt1"/>
+          </a:fontRef>
+        </p:style>
+        <p:txBody>
+          <a:bodyPr rtlCol="0" anchor="ctr"/>
+          <a:lstStyle/>
+          <a:p/>
+        </p:txBody>
+      </p:sp>
+      <p:sp>
+        <p:nvSpPr>
+          <p:cNvPr id="8" name="TextBox 7"/>
+          <p:cNvSpPr txBox="1"/>
+          <p:nvPr/>
+        </p:nvSpPr>
+        <p:spPr>
+          <a:xfrm>
+            <a:off x="502920" y="1298448"/>
+            <a:ext cx="292608" cy="219456"/>
+          </a:xfrm>
+          <a:prstGeom prst="rect">
+            <a:avLst/>
+          </a:prstGeom>
+          <a:noFill/>
+        </p:spPr>
+        <p:txBody>
+          <a:bodyPr wrap="square" lIns="0" rIns="0" tIns="0" bIns="0">
+            <a:spAutoFit/>
+          </a:bodyPr>
+          <a:lstStyle/>
+          <a:p>
+            <a:pPr algn="ctr"/>
+            <a:r>
+              <a:rPr sz="1000" b="1" i="0">
+                <a:solidFill>
+                  <a:srgbClr val="0B1120"/>
+                </a:solidFill>
+                <a:latin typeface="Calibri"/>
+              </a:rPr>
+              <a:t>1</a:t>
+            </a:r>
+          </a:p>
+        </p:txBody>
+      </p:sp>
+      <p:sp>
+        <p:nvSpPr>
+          <p:cNvPr id="9" name="TextBox 8"/>
+          <p:cNvSpPr txBox="1"/>
+          <p:nvPr/>
+        </p:nvSpPr>
+        <p:spPr>
+          <a:xfrm>
+            <a:off x="896112" y="1271016"/>
+            <a:ext cx="2057400" cy="274320"/>
+          </a:xfrm>
+          <a:prstGeom prst="rect">
+            <a:avLst/>
+          </a:prstGeom>
+          <a:noFill/>
+        </p:spPr>
+        <p:txBody>
+          <a:bodyPr wrap="square" lIns="0" rIns="0" tIns="0" bIns="0">
+            <a:spAutoFit/>
+          </a:bodyPr>
+          <a:lstStyle/>
+          <a:p>
+            <a:pPr algn="l"/>
+            <a:r>
+              <a:rPr sz="1200" b="1" i="0">
+                <a:solidFill>
+                  <a:srgbClr val="0AADA4"/>
+                </a:solidFill>
+                <a:latin typeface="Calibri"/>
+              </a:rPr>
+              <a:t>All ~17 quarters</a:t>
+            </a:r>
+          </a:p>
+        </p:txBody>
+      </p:sp>
+      <p:sp>
+        <p:nvSpPr>
+          <p:cNvPr id="10" name="TextBox 9"/>
+          <p:cNvSpPr txBox="1"/>
+          <p:nvPr/>
+        </p:nvSpPr>
+        <p:spPr>
+          <a:xfrm>
+            <a:off x="502920" y="1645919"/>
+            <a:ext cx="2423160" cy="384048"/>
+          </a:xfrm>
+          <a:prstGeom prst="rect">
+            <a:avLst/>
+          </a:prstGeom>
+          <a:noFill/>
+        </p:spPr>
+        <p:txBody>
+          <a:bodyPr wrap="square" lIns="0" rIns="0" tIns="0" bIns="0">
+            <a:spAutoFit/>
+          </a:bodyPr>
+          <a:lstStyle/>
+          <a:p>
+            <a:pPr algn="l"/>
+            <a:r>
+              <a:rPr sz="1000" b="0" i="0">
+                <a:solidFill>
+                  <a:srgbClr val="FFFFFF"/>
+                </a:solidFill>
+                <a:latin typeface="Calibri"/>
+              </a:rPr>
+              <a:t>4 years per star, stitched; known transits masked before detrending</a:t>
+            </a:r>
+          </a:p>
+        </p:txBody>
+      </p:sp>
+      <p:sp>
+        <p:nvSpPr>
+          <p:cNvPr id="11" name="TextBox 10"/>
+          <p:cNvSpPr txBox="1"/>
+          <p:nvPr/>
+        </p:nvSpPr>
+        <p:spPr>
+          <a:xfrm>
+            <a:off x="502920" y="2066543"/>
+            <a:ext cx="2423160" cy="292608"/>
+          </a:xfrm>
+          <a:prstGeom prst="rect">
+            <a:avLst/>
+          </a:prstGeom>
+          <a:noFill/>
+        </p:spPr>
+        <p:txBody>
+          <a:bodyPr wrap="square" lIns="0" rIns="0" tIns="0" bIns="0">
+            <a:spAutoFit/>
+          </a:bodyPr>
+          <a:lstStyle/>
+          <a:p>
+            <a:pPr algn="l"/>
+            <a:r>
+              <a:rPr sz="900" b="0" i="1">
+                <a:solidFill>
+                  <a:srgbClr val="8CAABF"/>
+                </a:solidFill>
+                <a:latin typeface="Calibri"/>
+              </a:rPr>
+              <a:t>Long-period planets transit at least once</a:t>
+            </a:r>
+          </a:p>
+        </p:txBody>
+      </p:sp>
+      <p:sp>
+        <p:nvSpPr>
+          <p:cNvPr id="12" name="Card 2"/>
+          <p:cNvSpPr/>
+          <p:nvPr/>
+        </p:nvSpPr>
+        <p:spPr>
+          <a:xfrm>
+            <a:off x="3200400" y="1115568"/>
+            <a:ext cx="2697480" cy="1298448"/>
+          </a:xfrm>
+          <a:prstGeom prst="rect">
+            <a:avLst/>
+          </a:prstGeom>
+          <a:solidFill>
+            <a:srgbClr val="132140"/>
+          </a:solidFill>
+          <a:ln w="12700">
+            <a:solidFill>
+              <a:srgbClr val="2E4060"/>
+            </a:solidFill>
+          </a:ln>
+          <a:effectLst/>
+        </p:spPr>
+        <p:style>
+          <a:lnRef idx="1">
+            <a:schemeClr val="accent1"/>
+          </a:lnRef>
+          <a:fillRef idx="3">
+            <a:schemeClr val="accent1"/>
+          </a:fillRef>
+          <a:effectRef idx="2">
+            <a:schemeClr val="accent1"/>
+          </a:effectRef>
+          <a:fontRef idx="minor">
+            <a:schemeClr val="lt1"/>
+          </a:fontRef>
+        </p:style>
+        <p:txBody>
+          <a:bodyPr rtlCol="0" anchor="ctr"/>
+          <a:lstStyle/>
+          <a:p>
+            <a:pPr algn="ctr"/>
+          </a:p>
+        </p:txBody>
+      </p:sp>
+      <p:sp>
+        <p:nvSpPr>
+          <p:cNvPr id="13" name="Card 2 number"/>
+          <p:cNvSpPr/>
+          <p:nvPr/>
+        </p:nvSpPr>
+        <p:spPr>
+          <a:xfrm>
+            <a:off x="3337560" y="1252728"/>
+            <a:ext cx="292608" cy="292608"/>
+          </a:xfrm>
+          <a:prstGeom prst="ellipse">
+            <a:avLst/>
+          </a:prstGeom>
+          <a:solidFill>
+            <a:srgbClr val="0AADA4"/>
+          </a:solidFill>
+          <a:ln>
+            <a:noFill/>
+          </a:ln>
+          <a:effectLst/>
+        </p:spPr>
+        <p:style>
+          <a:lnRef idx="1">
+            <a:schemeClr val="accent1"/>
+          </a:lnRef>
+          <a:fillRef idx="3">
+            <a:schemeClr val="accent1"/>
+          </a:fillRef>
+          <a:effectRef idx="2">
+            <a:schemeClr val="accent1"/>
+          </a:effectRef>
+          <a:fontRef idx="minor">
+            <a:schemeClr val="lt1"/>
+          </a:fontRef>
+        </p:style>
+        <p:txBody>
+          <a:bodyPr rtlCol="0" anchor="ctr"/>
+          <a:lstStyle/>
+          <a:p/>
+        </p:txBody>
+      </p:sp>
+      <p:sp>
+        <p:nvSpPr>
+          <p:cNvPr id="14" name="TextBox 13"/>
+          <p:cNvSpPr txBox="1"/>
+          <p:nvPr/>
+        </p:nvSpPr>
+        <p:spPr>
+          <a:xfrm>
+            <a:off x="3337560" y="1298448"/>
+            <a:ext cx="292608" cy="219456"/>
+          </a:xfrm>
+          <a:prstGeom prst="rect">
+            <a:avLst/>
+          </a:prstGeom>
+          <a:noFill/>
+        </p:spPr>
+        <p:txBody>
+          <a:bodyPr wrap="square" lIns="0" rIns="0" tIns="0" bIns="0">
+            <a:spAutoFit/>
+          </a:bodyPr>
+          <a:lstStyle/>
+          <a:p>
+            <a:pPr algn="ctr"/>
+            <a:r>
+              <a:rPr sz="1000" b="1" i="0">
+                <a:solidFill>
+                  <a:srgbClr val="0B1120"/>
+                </a:solidFill>
+                <a:latin typeface="Calibri"/>
+              </a:rPr>
+              <a:t>2</a:t>
+            </a:r>
+          </a:p>
+        </p:txBody>
+      </p:sp>
+      <p:sp>
+        <p:nvSpPr>
+          <p:cNvPr id="15" name="TextBox 14"/>
+          <p:cNvSpPr txBox="1"/>
+          <p:nvPr/>
+        </p:nvSpPr>
+        <p:spPr>
+          <a:xfrm>
+            <a:off x="3730752" y="1271016"/>
+            <a:ext cx="2057400" cy="274320"/>
+          </a:xfrm>
+          <a:prstGeom prst="rect">
+            <a:avLst/>
+          </a:prstGeom>
+          <a:noFill/>
+        </p:spPr>
+        <p:txBody>
+          <a:bodyPr wrap="square" lIns="0" rIns="0" tIns="0" bIns="0">
+            <a:spAutoFit/>
+          </a:bodyPr>
+          <a:lstStyle/>
+          <a:p>
+            <a:pPr algn="l"/>
+            <a:r>
+              <a:rPr sz="1200" b="1" i="0">
+                <a:solidFill>
+                  <a:srgbClr val="0AADA4"/>
+                </a:solidFill>
+                <a:latin typeface="Calibri"/>
+              </a:rPr>
+              <a:t>Global + local views</a:t>
+            </a:r>
+          </a:p>
+        </p:txBody>
+      </p:sp>
+      <p:sp>
+        <p:nvSpPr>
+          <p:cNvPr id="16" name="TextBox 15"/>
+          <p:cNvSpPr txBox="1"/>
+          <p:nvPr/>
+        </p:nvSpPr>
+        <p:spPr>
+          <a:xfrm>
+            <a:off x="3337560" y="1645919"/>
+            <a:ext cx="2423160" cy="384048"/>
+          </a:xfrm>
+          <a:prstGeom prst="rect">
+            <a:avLst/>
+          </a:prstGeom>
+          <a:noFill/>
+        </p:spPr>
+        <p:txBody>
+          <a:bodyPr wrap="square" lIns="0" rIns="0" tIns="0" bIns="0">
+            <a:spAutoFit/>
+          </a:bodyPr>
+          <a:lstStyle/>
+          <a:p>
+            <a:pPr algn="l"/>
+            <a:r>
+              <a:rPr sz="1000" b="0" i="0">
+                <a:solidFill>
+                  <a:srgbClr val="FFFFFF"/>
+                </a:solidFill>
+                <a:latin typeface="Calibri"/>
+              </a:rPr>
+              <a:t>Whole orbit (2,001 bins) and transit close-up (201 bins)</a:t>
+            </a:r>
+          </a:p>
+        </p:txBody>
+      </p:sp>
+      <p:sp>
+        <p:nvSpPr>
+          <p:cNvPr id="17" name="TextBox 16"/>
+          <p:cNvSpPr txBox="1"/>
+          <p:nvPr/>
+        </p:nvSpPr>
+        <p:spPr>
+          <a:xfrm>
+            <a:off x="3337560" y="2066543"/>
+            <a:ext cx="2423160" cy="292608"/>
+          </a:xfrm>
+          <a:prstGeom prst="rect">
+            <a:avLst/>
+          </a:prstGeom>
+          <a:noFill/>
+        </p:spPr>
+        <p:txBody>
+          <a:bodyPr wrap="square" lIns="0" rIns="0" tIns="0" bIns="0">
+            <a:spAutoFit/>
+          </a:bodyPr>
+          <a:lstStyle/>
+          <a:p>
+            <a:pPr algn="l"/>
+            <a:r>
+              <a:rPr sz="900" b="0" i="1">
+                <a:solidFill>
+                  <a:srgbClr val="8CAABF"/>
+                </a:solidFill>
+                <a:latin typeface="Calibri"/>
+              </a:rPr>
+              <a:t>AstroNet (Shallue &amp; Vanderburg 2018)</a:t>
+            </a:r>
+          </a:p>
+        </p:txBody>
+      </p:sp>
+      <p:sp>
+        <p:nvSpPr>
+          <p:cNvPr id="18" name="Card 3"/>
+          <p:cNvSpPr/>
+          <p:nvPr/>
+        </p:nvSpPr>
+        <p:spPr>
+          <a:xfrm>
+            <a:off x="6035040" y="1115568"/>
+            <a:ext cx="2697480" cy="1298448"/>
+          </a:xfrm>
+          <a:prstGeom prst="rect">
+            <a:avLst/>
+          </a:prstGeom>
+          <a:solidFill>
+            <a:srgbClr val="132140"/>
+          </a:solidFill>
+          <a:ln w="12700">
+            <a:solidFill>
+              <a:srgbClr val="2E4060"/>
+            </a:solidFill>
+          </a:ln>
+          <a:effectLst/>
+        </p:spPr>
+        <p:style>
+          <a:lnRef idx="1">
+            <a:schemeClr val="accent1"/>
+          </a:lnRef>
+          <a:fillRef idx="3">
+            <a:schemeClr val="accent1"/>
+          </a:fillRef>
+          <a:effectRef idx="2">
+            <a:schemeClr val="accent1"/>
+          </a:effectRef>
+          <a:fontRef idx="minor">
+            <a:schemeClr val="lt1"/>
+          </a:fontRef>
+        </p:style>
+        <p:txBody>
+          <a:bodyPr rtlCol="0" anchor="ctr"/>
+          <a:lstStyle/>
+          <a:p>
+            <a:pPr algn="ctr"/>
+          </a:p>
+        </p:txBody>
+      </p:sp>
+      <p:sp>
+        <p:nvSpPr>
+          <p:cNvPr id="19" name="Card 3 number"/>
+          <p:cNvSpPr/>
+          <p:nvPr/>
+        </p:nvSpPr>
+        <p:spPr>
+          <a:xfrm>
+            <a:off x="6172200" y="1252728"/>
+            <a:ext cx="292608" cy="292608"/>
+          </a:xfrm>
+          <a:prstGeom prst="ellipse">
+            <a:avLst/>
+          </a:prstGeom>
+          <a:solidFill>
+            <a:srgbClr val="0AADA4"/>
+          </a:solidFill>
+          <a:ln>
+            <a:noFill/>
+          </a:ln>
+          <a:effectLst/>
+        </p:spPr>
+        <p:style>
+          <a:lnRef idx="1">
+            <a:schemeClr val="accent1"/>
+          </a:lnRef>
+          <a:fillRef idx="3">
+            <a:schemeClr val="accent1"/>
+          </a:fillRef>
+          <a:effectRef idx="2">
+            <a:schemeClr val="accent1"/>
+          </a:effectRef>
+          <a:fontRef idx="minor">
+            <a:schemeClr val="lt1"/>
+          </a:fontRef>
+        </p:style>
+        <p:txBody>
+          <a:bodyPr rtlCol="0" anchor="ctr"/>
+          <a:lstStyle/>
+          <a:p/>
+        </p:txBody>
+      </p:sp>
+      <p:sp>
+        <p:nvSpPr>
+          <p:cNvPr id="20" name="TextBox 19"/>
+          <p:cNvSpPr txBox="1"/>
+          <p:nvPr/>
+        </p:nvSpPr>
+        <p:spPr>
+          <a:xfrm>
+            <a:off x="6172200" y="1298448"/>
+            <a:ext cx="292608" cy="219456"/>
+          </a:xfrm>
+          <a:prstGeom prst="rect">
+            <a:avLst/>
+          </a:prstGeom>
+          <a:noFill/>
+        </p:spPr>
+        <p:txBody>
+          <a:bodyPr wrap="square" lIns="0" rIns="0" tIns="0" bIns="0">
+            <a:spAutoFit/>
+          </a:bodyPr>
+          <a:lstStyle/>
+          <a:p>
+            <a:pPr algn="ctr"/>
+            <a:r>
+              <a:rPr sz="1000" b="1" i="0">
+                <a:solidFill>
+                  <a:srgbClr val="0B1120"/>
+                </a:solidFill>
+                <a:latin typeface="Calibri"/>
+              </a:rPr>
+              <a:t>3</a:t>
+            </a:r>
+          </a:p>
+        </p:txBody>
+      </p:sp>
+      <p:sp>
+        <p:nvSpPr>
+          <p:cNvPr id="21" name="TextBox 20"/>
+          <p:cNvSpPr txBox="1"/>
+          <p:nvPr/>
+        </p:nvSpPr>
+        <p:spPr>
+          <a:xfrm>
+            <a:off x="6565392" y="1271016"/>
+            <a:ext cx="2057400" cy="274320"/>
+          </a:xfrm>
+          <a:prstGeom prst="rect">
+            <a:avLst/>
+          </a:prstGeom>
+          <a:noFill/>
+        </p:spPr>
+        <p:txBody>
+          <a:bodyPr wrap="square" lIns="0" rIns="0" tIns="0" bIns="0">
+            <a:spAutoFit/>
+          </a:bodyPr>
+          <a:lstStyle/>
+          <a:p>
+            <a:pPr algn="l"/>
+            <a:r>
+              <a:rPr sz="1200" b="1" i="0">
+                <a:solidFill>
+                  <a:srgbClr val="0AADA4"/>
+                </a:solidFill>
+                <a:latin typeface="Calibri"/>
+              </a:rPr>
+              <a:t>Eclipsing-binary checks</a:t>
+            </a:r>
+          </a:p>
+        </p:txBody>
+      </p:sp>
+      <p:sp>
+        <p:nvSpPr>
+          <p:cNvPr id="22" name="TextBox 21"/>
+          <p:cNvSpPr txBox="1"/>
+          <p:nvPr/>
+        </p:nvSpPr>
+        <p:spPr>
+          <a:xfrm>
+            <a:off x="6172200" y="1645919"/>
+            <a:ext cx="2423160" cy="384048"/>
+          </a:xfrm>
+          <a:prstGeom prst="rect">
+            <a:avLst/>
+          </a:prstGeom>
+          <a:noFill/>
+        </p:spPr>
+        <p:txBody>
+          <a:bodyPr wrap="square" lIns="0" rIns="0" tIns="0" bIns="0">
+            <a:spAutoFit/>
+          </a:bodyPr>
+          <a:lstStyle/>
+          <a:p>
+            <a:pPr algn="l"/>
+            <a:r>
+              <a:rPr sz="1000" b="0" i="0">
+                <a:solidFill>
+                  <a:srgbClr val="FFFFFF"/>
+                </a:solidFill>
+                <a:latin typeface="Calibri"/>
+              </a:rPr>
+              <a:t>Odd vs even transits, secondary eclipse, centroid shift</a:t>
+            </a:r>
+          </a:p>
+        </p:txBody>
+      </p:sp>
+      <p:sp>
+        <p:nvSpPr>
+          <p:cNvPr id="23" name="TextBox 22"/>
+          <p:cNvSpPr txBox="1"/>
+          <p:nvPr/>
+        </p:nvSpPr>
+        <p:spPr>
+          <a:xfrm>
+            <a:off x="6172200" y="2066543"/>
+            <a:ext cx="2423160" cy="292608"/>
+          </a:xfrm>
+          <a:prstGeom prst="rect">
+            <a:avLst/>
+          </a:prstGeom>
+          <a:noFill/>
+        </p:spPr>
+        <p:txBody>
+          <a:bodyPr wrap="square" lIns="0" rIns="0" tIns="0" bIns="0">
+            <a:spAutoFit/>
+          </a:bodyPr>
+          <a:lstStyle/>
+          <a:p>
+            <a:pPr algn="l"/>
+            <a:r>
+              <a:rPr sz="900" b="0" i="1">
+                <a:solidFill>
+                  <a:srgbClr val="8CAABF"/>
+                </a:solidFill>
+                <a:latin typeface="Calibri"/>
+              </a:rPr>
+              <a:t>The common false-positive signatures (ExoMiner-style)</a:t>
+            </a:r>
+          </a:p>
+        </p:txBody>
+      </p:sp>
+      <p:sp>
+        <p:nvSpPr>
+          <p:cNvPr id="24" name="Card 4"/>
+          <p:cNvSpPr/>
+          <p:nvPr/>
+        </p:nvSpPr>
+        <p:spPr>
+          <a:xfrm>
+            <a:off x="365760" y="2487168"/>
+            <a:ext cx="2697480" cy="1298448"/>
+          </a:xfrm>
+          <a:prstGeom prst="rect">
+            <a:avLst/>
+          </a:prstGeom>
+          <a:solidFill>
+            <a:srgbClr val="132140"/>
+          </a:solidFill>
+          <a:ln w="12700">
+            <a:solidFill>
+              <a:srgbClr val="2E4060"/>
+            </a:solidFill>
+          </a:ln>
+          <a:effectLst/>
+        </p:spPr>
+        <p:style>
+          <a:lnRef idx="1">
+            <a:schemeClr val="accent1"/>
+          </a:lnRef>
+          <a:fillRef idx="3">
+            <a:schemeClr val="accent1"/>
+          </a:fillRef>
+          <a:effectRef idx="2">
+            <a:schemeClr val="accent1"/>
+          </a:effectRef>
+          <a:fontRef idx="minor">
+            <a:schemeClr val="lt1"/>
+          </a:fontRef>
+        </p:style>
+        <p:txBody>
+          <a:bodyPr rtlCol="0" anchor="ctr"/>
+          <a:lstStyle/>
+          <a:p>
+            <a:pPr algn="ctr"/>
+          </a:p>
+        </p:txBody>
+      </p:sp>
+      <p:sp>
+        <p:nvSpPr>
+          <p:cNvPr id="25" name="Card 4 number"/>
+          <p:cNvSpPr/>
+          <p:nvPr/>
+        </p:nvSpPr>
+        <p:spPr>
+          <a:xfrm>
+            <a:off x="502920" y="2624327"/>
+            <a:ext cx="292608" cy="292608"/>
+          </a:xfrm>
+          <a:prstGeom prst="ellipse">
+            <a:avLst/>
+          </a:prstGeom>
+          <a:solidFill>
+            <a:srgbClr val="0AADA4"/>
+          </a:solidFill>
+          <a:ln>
+            <a:noFill/>
+          </a:ln>
+          <a:effectLst/>
+        </p:spPr>
+        <p:style>
+          <a:lnRef idx="1">
+            <a:schemeClr val="accent1"/>
+          </a:lnRef>
+          <a:fillRef idx="3">
+            <a:schemeClr val="accent1"/>
+          </a:fillRef>
+          <a:effectRef idx="2">
+            <a:schemeClr val="accent1"/>
+          </a:effectRef>
+          <a:fontRef idx="minor">
+            <a:schemeClr val="lt1"/>
+          </a:fontRef>
+        </p:style>
+        <p:txBody>
+          <a:bodyPr rtlCol="0" anchor="ctr"/>
+          <a:lstStyle/>
+          <a:p/>
+        </p:txBody>
+      </p:sp>
+      <p:sp>
+        <p:nvSpPr>
+          <p:cNvPr id="26" name="TextBox 25"/>
+          <p:cNvSpPr txBox="1"/>
+          <p:nvPr/>
+        </p:nvSpPr>
+        <p:spPr>
+          <a:xfrm>
+            <a:off x="502920" y="2670048"/>
+            <a:ext cx="292608" cy="219456"/>
+          </a:xfrm>
+          <a:prstGeom prst="rect">
+            <a:avLst/>
+          </a:prstGeom>
+          <a:noFill/>
+        </p:spPr>
+        <p:txBody>
+          <a:bodyPr wrap="square" lIns="0" rIns="0" tIns="0" bIns="0">
+            <a:spAutoFit/>
+          </a:bodyPr>
+          <a:lstStyle/>
+          <a:p>
+            <a:pPr algn="ctr"/>
+            <a:r>
+              <a:rPr sz="1000" b="1" i="0">
+                <a:solidFill>
+                  <a:srgbClr val="0B1120"/>
+                </a:solidFill>
+                <a:latin typeface="Calibri"/>
+              </a:rPr>
+              <a:t>4</a:t>
+            </a:r>
+          </a:p>
+        </p:txBody>
+      </p:sp>
+      <p:sp>
+        <p:nvSpPr>
+          <p:cNvPr id="27" name="TextBox 26"/>
+          <p:cNvSpPr txBox="1"/>
+          <p:nvPr/>
+        </p:nvSpPr>
+        <p:spPr>
+          <a:xfrm>
+            <a:off x="896112" y="2642615"/>
+            <a:ext cx="2057400" cy="274320"/>
+          </a:xfrm>
+          <a:prstGeom prst="rect">
+            <a:avLst/>
+          </a:prstGeom>
+          <a:noFill/>
+        </p:spPr>
+        <p:txBody>
+          <a:bodyPr wrap="square" lIns="0" rIns="0" tIns="0" bIns="0">
+            <a:spAutoFit/>
+          </a:bodyPr>
+          <a:lstStyle/>
+          <a:p>
+            <a:pPr algn="l"/>
+            <a:r>
+              <a:rPr sz="1200" b="1" i="0">
+                <a:solidFill>
+                  <a:srgbClr val="0AADA4"/>
+                </a:solidFill>
+                <a:latin typeface="Calibri"/>
+              </a:rPr>
+              <a:t>Catalog features</a:t>
+            </a:r>
+          </a:p>
+        </p:txBody>
+      </p:sp>
+      <p:sp>
+        <p:nvSpPr>
+          <p:cNvPr id="28" name="TextBox 27"/>
+          <p:cNvSpPr txBox="1"/>
+          <p:nvPr/>
+        </p:nvSpPr>
+        <p:spPr>
+          <a:xfrm>
+            <a:off x="502920" y="3017520"/>
+            <a:ext cx="2423160" cy="384048"/>
+          </a:xfrm>
+          <a:prstGeom prst="rect">
+            <a:avLst/>
+          </a:prstGeom>
+          <a:noFill/>
+        </p:spPr>
+        <p:txBody>
+          <a:bodyPr wrap="square" lIns="0" rIns="0" tIns="0" bIns="0">
+            <a:spAutoFit/>
+          </a:bodyPr>
+          <a:lstStyle/>
+          <a:p>
+            <a:pPr algn="l"/>
+            <a:r>
+              <a:rPr sz="1000" b="0" i="0">
+                <a:solidFill>
+                  <a:srgbClr val="FFFFFF"/>
+                </a:solidFill>
+                <a:latin typeface="Calibri"/>
+              </a:rPr>
+              <a:t>NASA's transit fit and stellar parameters in their own branch</a:t>
+            </a:r>
+          </a:p>
+        </p:txBody>
+      </p:sp>
+      <p:sp>
+        <p:nvSpPr>
+          <p:cNvPr id="29" name="TextBox 28"/>
+          <p:cNvSpPr txBox="1"/>
+          <p:nvPr/>
+        </p:nvSpPr>
+        <p:spPr>
+          <a:xfrm>
+            <a:off x="502920" y="3438144"/>
+            <a:ext cx="2423160" cy="292608"/>
+          </a:xfrm>
+          <a:prstGeom prst="rect">
+            <a:avLst/>
+          </a:prstGeom>
+          <a:noFill/>
+        </p:spPr>
+        <p:txBody>
+          <a:bodyPr wrap="square" lIns="0" rIns="0" tIns="0" bIns="0">
+            <a:spAutoFit/>
+          </a:bodyPr>
+          <a:lstStyle/>
+          <a:p>
+            <a:pPr algn="l"/>
+            <a:r>
+              <a:rPr sz="900" b="0" i="1">
+                <a:solidFill>
+                  <a:srgbClr val="8CAABF"/>
+                </a:solidFill>
+                <a:latin typeface="Calibri"/>
+              </a:rPr>
+              <a:t>Radius, SNR and density separate planets from binaries</a:t>
+            </a:r>
+          </a:p>
+        </p:txBody>
+      </p:sp>
+      <p:sp>
+        <p:nvSpPr>
+          <p:cNvPr id="30" name="Card 5"/>
+          <p:cNvSpPr/>
+          <p:nvPr/>
+        </p:nvSpPr>
+        <p:spPr>
+          <a:xfrm>
+            <a:off x="3200400" y="2487168"/>
+            <a:ext cx="2697480" cy="1298448"/>
+          </a:xfrm>
+          <a:prstGeom prst="rect">
+            <a:avLst/>
+          </a:prstGeom>
+          <a:solidFill>
+            <a:srgbClr val="132140"/>
+          </a:solidFill>
+          <a:ln w="12700">
+            <a:solidFill>
+              <a:srgbClr val="2E4060"/>
+            </a:solidFill>
+          </a:ln>
+          <a:effectLst/>
+        </p:spPr>
+        <p:style>
+          <a:lnRef idx="1">
+            <a:schemeClr val="accent1"/>
+          </a:lnRef>
+          <a:fillRef idx="3">
+            <a:schemeClr val="accent1"/>
+          </a:fillRef>
+          <a:effectRef idx="2">
+            <a:schemeClr val="accent1"/>
+          </a:effectRef>
+          <a:fontRef idx="minor">
+            <a:schemeClr val="lt1"/>
+          </a:fontRef>
+        </p:style>
+        <p:txBody>
+          <a:bodyPr rtlCol="0" anchor="ctr"/>
+          <a:lstStyle/>
+          <a:p>
+            <a:pPr algn="ctr"/>
+          </a:p>
+        </p:txBody>
+      </p:sp>
+      <p:sp>
+        <p:nvSpPr>
+          <p:cNvPr id="31" name="Card 5 number"/>
+          <p:cNvSpPr/>
+          <p:nvPr/>
+        </p:nvSpPr>
+        <p:spPr>
+          <a:xfrm>
+            <a:off x="3337560" y="2624327"/>
+            <a:ext cx="292608" cy="292608"/>
+          </a:xfrm>
+          <a:prstGeom prst="ellipse">
+            <a:avLst/>
+          </a:prstGeom>
+          <a:solidFill>
+            <a:srgbClr val="0AADA4"/>
+          </a:solidFill>
+          <a:ln>
+            <a:noFill/>
+          </a:ln>
+          <a:effectLst/>
+        </p:spPr>
+        <p:style>
+          <a:lnRef idx="1">
+            <a:schemeClr val="accent1"/>
+          </a:lnRef>
+          <a:fillRef idx="3">
+            <a:schemeClr val="accent1"/>
+          </a:fillRef>
+          <a:effectRef idx="2">
+            <a:schemeClr val="accent1"/>
+          </a:effectRef>
+          <a:fontRef idx="minor">
+            <a:schemeClr val="lt1"/>
+          </a:fontRef>
+        </p:style>
+        <p:txBody>
+          <a:bodyPr rtlCol="0" anchor="ctr"/>
+          <a:lstStyle/>
+          <a:p/>
+        </p:txBody>
+      </p:sp>
+      <p:sp>
+        <p:nvSpPr>
+          <p:cNvPr id="32" name="TextBox 31"/>
+          <p:cNvSpPr txBox="1"/>
+          <p:nvPr/>
+        </p:nvSpPr>
+        <p:spPr>
+          <a:xfrm>
+            <a:off x="3337560" y="2670048"/>
+            <a:ext cx="292608" cy="219456"/>
+          </a:xfrm>
+          <a:prstGeom prst="rect">
+            <a:avLst/>
+          </a:prstGeom>
+          <a:noFill/>
+        </p:spPr>
+        <p:txBody>
+          <a:bodyPr wrap="square" lIns="0" rIns="0" tIns="0" bIns="0">
+            <a:spAutoFit/>
+          </a:bodyPr>
+          <a:lstStyle/>
+          <a:p>
+            <a:pPr algn="ctr"/>
+            <a:r>
+              <a:rPr sz="1000" b="1" i="0">
+                <a:solidFill>
+                  <a:srgbClr val="0B1120"/>
+                </a:solidFill>
+                <a:latin typeface="Calibri"/>
+              </a:rPr>
+              <a:t>5</a:t>
+            </a:r>
+          </a:p>
+        </p:txBody>
+      </p:sp>
+      <p:sp>
+        <p:nvSpPr>
+          <p:cNvPr id="33" name="TextBox 32"/>
+          <p:cNvSpPr txBox="1"/>
+          <p:nvPr/>
+        </p:nvSpPr>
+        <p:spPr>
+          <a:xfrm>
+            <a:off x="3730752" y="2642615"/>
+            <a:ext cx="2057400" cy="274320"/>
+          </a:xfrm>
+          <a:prstGeom prst="rect">
+            <a:avLst/>
+          </a:prstGeom>
+          <a:noFill/>
+        </p:spPr>
+        <p:txBody>
+          <a:bodyPr wrap="square" lIns="0" rIns="0" tIns="0" bIns="0">
+            <a:spAutoFit/>
+          </a:bodyPr>
+          <a:lstStyle/>
+          <a:p>
+            <a:pPr algn="l"/>
+            <a:r>
+              <a:rPr sz="1200" b="1" i="0">
+                <a:solidFill>
+                  <a:srgbClr val="0AADA4"/>
+                </a:solidFill>
+                <a:latin typeface="Calibri"/>
+              </a:rPr>
+              <a:t>Fair split + ensemble</a:t>
+            </a:r>
+          </a:p>
+        </p:txBody>
+      </p:sp>
+      <p:sp>
+        <p:nvSpPr>
+          <p:cNvPr id="34" name="TextBox 33"/>
+          <p:cNvSpPr txBox="1"/>
+          <p:nvPr/>
+        </p:nvSpPr>
+        <p:spPr>
+          <a:xfrm>
+            <a:off x="3337560" y="3017520"/>
+            <a:ext cx="2423160" cy="384048"/>
+          </a:xfrm>
+          <a:prstGeom prst="rect">
+            <a:avLst/>
+          </a:prstGeom>
+          <a:noFill/>
+        </p:spPr>
+        <p:txBody>
+          <a:bodyPr wrap="square" lIns="0" rIns="0" tIns="0" bIns="0">
+            <a:spAutoFit/>
+          </a:bodyPr>
+          <a:lstStyle/>
+          <a:p>
+            <a:pPr algn="l"/>
+            <a:r>
+              <a:rPr sz="1000" b="0" i="0">
+                <a:solidFill>
+                  <a:srgbClr val="FFFFFF"/>
+                </a:solidFill>
+                <a:latin typeface="Calibri"/>
+              </a:rPr>
+              <a:t>No star in two splits; 5 networks averaged</a:t>
+            </a:r>
+          </a:p>
+        </p:txBody>
+      </p:sp>
+      <p:sp>
+        <p:nvSpPr>
+          <p:cNvPr id="35" name="TextBox 34"/>
+          <p:cNvSpPr txBox="1"/>
+          <p:nvPr/>
+        </p:nvSpPr>
+        <p:spPr>
+          <a:xfrm>
+            <a:off x="3337560" y="3438144"/>
+            <a:ext cx="2423160" cy="292608"/>
+          </a:xfrm>
+          <a:prstGeom prst="rect">
+            <a:avLst/>
+          </a:prstGeom>
+          <a:noFill/>
+        </p:spPr>
+        <p:txBody>
+          <a:bodyPr wrap="square" lIns="0" rIns="0" tIns="0" bIns="0">
+            <a:spAutoFit/>
+          </a:bodyPr>
+          <a:lstStyle/>
+          <a:p>
+            <a:pPr algn="l"/>
+            <a:r>
+              <a:rPr sz="900" b="0" i="1">
+                <a:solidFill>
+                  <a:srgbClr val="8CAABF"/>
+                </a:solidFill>
+                <a:latin typeface="Calibri"/>
+              </a:rPr>
+              <a:t>Planets on one star can't leak into the test set</a:t>
+            </a:r>
+          </a:p>
+        </p:txBody>
+      </p:sp>
+      <p:sp>
+        <p:nvSpPr>
+          <p:cNvPr id="36" name="Card 6"/>
+          <p:cNvSpPr/>
+          <p:nvPr/>
+        </p:nvSpPr>
+        <p:spPr>
+          <a:xfrm>
+            <a:off x="6035040" y="2487168"/>
+            <a:ext cx="2697480" cy="1298448"/>
+          </a:xfrm>
+          <a:prstGeom prst="rect">
+            <a:avLst/>
+          </a:prstGeom>
+          <a:solidFill>
+            <a:srgbClr val="132140"/>
+          </a:solidFill>
+          <a:ln w="12700">
+            <a:solidFill>
+              <a:srgbClr val="2E4060"/>
+            </a:solidFill>
+          </a:ln>
+          <a:effectLst/>
+        </p:spPr>
+        <p:style>
+          <a:lnRef idx="1">
+            <a:schemeClr val="accent1"/>
+          </a:lnRef>
+          <a:fillRef idx="3">
+            <a:schemeClr val="accent1"/>
+          </a:fillRef>
+          <a:effectRef idx="2">
+            <a:schemeClr val="accent1"/>
+          </a:effectRef>
+          <a:fontRef idx="minor">
+            <a:schemeClr val="lt1"/>
+          </a:fontRef>
+        </p:style>
+        <p:txBody>
+          <a:bodyPr rtlCol="0" anchor="ctr"/>
+          <a:lstStyle/>
+          <a:p>
+            <a:pPr algn="ctr"/>
+          </a:p>
+        </p:txBody>
+      </p:sp>
+      <p:sp>
+        <p:nvSpPr>
+          <p:cNvPr id="37" name="Card 6 number"/>
+          <p:cNvSpPr/>
+          <p:nvPr/>
+        </p:nvSpPr>
+        <p:spPr>
+          <a:xfrm>
+            <a:off x="6172200" y="2624327"/>
+            <a:ext cx="292608" cy="292608"/>
+          </a:xfrm>
+          <a:prstGeom prst="ellipse">
+            <a:avLst/>
+          </a:prstGeom>
+          <a:solidFill>
+            <a:srgbClr val="0AADA4"/>
+          </a:solidFill>
+          <a:ln>
+            <a:noFill/>
+          </a:ln>
+          <a:effectLst/>
+        </p:spPr>
+        <p:style>
+          <a:lnRef idx="1">
+            <a:schemeClr val="accent1"/>
+          </a:lnRef>
+          <a:fillRef idx="3">
+            <a:schemeClr val="accent1"/>
+          </a:fillRef>
+          <a:effectRef idx="2">
+            <a:schemeClr val="accent1"/>
+          </a:effectRef>
+          <a:fontRef idx="minor">
+            <a:schemeClr val="lt1"/>
+          </a:fontRef>
+        </p:style>
+        <p:txBody>
+          <a:bodyPr rtlCol="0" anchor="ctr"/>
+          <a:lstStyle/>
+          <a:p/>
+        </p:txBody>
+      </p:sp>
+      <p:sp>
+        <p:nvSpPr>
+          <p:cNvPr id="38" name="TextBox 37"/>
+          <p:cNvSpPr txBox="1"/>
+          <p:nvPr/>
+        </p:nvSpPr>
+        <p:spPr>
+          <a:xfrm>
+            <a:off x="6172200" y="2670048"/>
+            <a:ext cx="292608" cy="219456"/>
+          </a:xfrm>
+          <a:prstGeom prst="rect">
+            <a:avLst/>
+          </a:prstGeom>
+          <a:noFill/>
+        </p:spPr>
+        <p:txBody>
+          <a:bodyPr wrap="square" lIns="0" rIns="0" tIns="0" bIns="0">
+            <a:spAutoFit/>
+          </a:bodyPr>
+          <a:lstStyle/>
+          <a:p>
+            <a:pPr algn="ctr"/>
+            <a:r>
+              <a:rPr sz="1000" b="1" i="0">
+                <a:solidFill>
+                  <a:srgbClr val="0B1120"/>
+                </a:solidFill>
+                <a:latin typeface="Calibri"/>
+              </a:rPr>
+              <a:t>6</a:t>
+            </a:r>
+          </a:p>
+        </p:txBody>
+      </p:sp>
+      <p:sp>
+        <p:nvSpPr>
+          <p:cNvPr id="39" name="TextBox 38"/>
+          <p:cNvSpPr txBox="1"/>
+          <p:nvPr/>
+        </p:nvSpPr>
+        <p:spPr>
+          <a:xfrm>
+            <a:off x="6565392" y="2642615"/>
+            <a:ext cx="2057400" cy="274320"/>
+          </a:xfrm>
+          <a:prstGeom prst="rect">
+            <a:avLst/>
+          </a:prstGeom>
+          <a:noFill/>
+        </p:spPr>
+        <p:txBody>
+          <a:bodyPr wrap="square" lIns="0" rIns="0" tIns="0" bIns="0">
+            <a:spAutoFit/>
+          </a:bodyPr>
+          <a:lstStyle/>
+          <a:p>
+            <a:pPr algn="l"/>
+            <a:r>
+              <a:rPr sz="1200" b="1" i="0">
+                <a:solidFill>
+                  <a:srgbClr val="0AADA4"/>
+                </a:solidFill>
+                <a:latin typeface="Calibri"/>
+              </a:rPr>
+              <a:t>Explainable</a:t>
+            </a:r>
+          </a:p>
+        </p:txBody>
+      </p:sp>
+      <p:sp>
+        <p:nvSpPr>
+          <p:cNvPr id="40" name="TextBox 39"/>
+          <p:cNvSpPr txBox="1"/>
+          <p:nvPr/>
+        </p:nvSpPr>
+        <p:spPr>
+          <a:xfrm>
+            <a:off x="6172200" y="3017520"/>
+            <a:ext cx="2423160" cy="384048"/>
+          </a:xfrm>
+          <a:prstGeom prst="rect">
+            <a:avLst/>
+          </a:prstGeom>
+          <a:noFill/>
+        </p:spPr>
+        <p:txBody>
+          <a:bodyPr wrap="square" lIns="0" rIns="0" tIns="0" bIns="0">
+            <a:spAutoFit/>
+          </a:bodyPr>
+          <a:lstStyle/>
+          <a:p>
+            <a:pPr algn="l"/>
+            <a:r>
+              <a:rPr sz="1000" b="0" i="0">
+                <a:solidFill>
+                  <a:srgbClr val="FFFFFF"/>
+                </a:solidFill>
+                <a:latin typeface="Calibri"/>
+              </a:rPr>
+              <a:t>Occlusion saliency: which part of the light curve mattered</a:t>
+            </a:r>
+          </a:p>
+        </p:txBody>
+      </p:sp>
+      <p:sp>
+        <p:nvSpPr>
+          <p:cNvPr id="41" name="TextBox 40"/>
+          <p:cNvSpPr txBox="1"/>
+          <p:nvPr/>
+        </p:nvSpPr>
+        <p:spPr>
+          <a:xfrm>
+            <a:off x="6172200" y="3438144"/>
+            <a:ext cx="2423160" cy="292608"/>
+          </a:xfrm>
+          <a:prstGeom prst="rect">
+            <a:avLst/>
+          </a:prstGeom>
+          <a:noFill/>
+        </p:spPr>
+        <p:txBody>
+          <a:bodyPr wrap="square" lIns="0" rIns="0" tIns="0" bIns="0">
+            <a:spAutoFit/>
+          </a:bodyPr>
+          <a:lstStyle/>
+          <a:p>
+            <a:pPr algn="l"/>
+            <a:r>
+              <a:rPr sz="900" b="0" i="1">
+                <a:solidFill>
+                  <a:srgbClr val="8CAABF"/>
+                </a:solidFill>
+                <a:latin typeface="Calibri"/>
+              </a:rPr>
+              <a:t>Shown in the web app for any KOI</a:t>
+            </a:r>
+          </a:p>
+        </p:txBody>
+      </p:sp>
+      <p:sp>
+        <p:nvSpPr>
+          <p:cNvPr id="42" name="Stat band"/>
+          <p:cNvSpPr/>
+          <p:nvPr/>
+        </p:nvSpPr>
+        <p:spPr>
+          <a:xfrm>
+            <a:off x="0" y="3886200"/>
+            <a:ext cx="9144000" cy="1257300"/>
+          </a:xfrm>
+          <a:prstGeom prst="rect">
+            <a:avLst/>
+          </a:prstGeom>
+          <a:solidFill>
+            <a:srgbClr val="0F1E3C"/>
+          </a:solidFill>
+          <a:ln>
+            <a:noFill/>
+          </a:ln>
+          <a:effectLst/>
+        </p:spPr>
+        <p:style>
+          <a:lnRef idx="1">
+            <a:schemeClr val="accent1"/>
+          </a:lnRef>
+          <a:fillRef idx="3">
+            <a:schemeClr val="accent1"/>
+          </a:fillRef>
+          <a:effectRef idx="2">
+            <a:schemeClr val="accent1"/>
+          </a:effectRef>
+          <a:fontRef idx="minor">
+            <a:schemeClr val="lt1"/>
+          </a:fontRef>
+        </p:style>
+        <p:txBody>
+          <a:bodyPr rtlCol="0" anchor="ctr"/>
+          <a:lstStyle/>
+          <a:p>
+            <a:pPr algn="ctr"/>
+          </a:p>
+        </p:txBody>
+      </p:sp>
+      <p:sp>
+        <p:nvSpPr>
+          <p:cNvPr id="43" name="TextBox 42"/>
+          <p:cNvSpPr txBox="1"/>
+          <p:nvPr/>
+        </p:nvSpPr>
+        <p:spPr>
+          <a:xfrm>
+            <a:off x="365760" y="4041648"/>
+            <a:ext cx="2011680" cy="502920"/>
+          </a:xfrm>
+          <a:prstGeom prst="rect">
+            <a:avLst/>
+          </a:prstGeom>
+          <a:noFill/>
+        </p:spPr>
+        <p:txBody>
+          <a:bodyPr wrap="square" lIns="0" rIns="0" tIns="0" bIns="0">
+            <a:spAutoFit/>
+          </a:bodyPr>
+          <a:lstStyle/>
+          <a:p>
+            <a:pPr algn="ctr"/>
+            <a:r>
+              <a:rPr sz="2600" b="1" i="0">
+                <a:solidFill>
+                  <a:srgbClr val="0AADA4"/>
+                </a:solidFill>
+                <a:latin typeface="Calibri"/>
+              </a:rPr>
+              <a:t>7,586</a:t>
+            </a:r>
+          </a:p>
+        </p:txBody>
+      </p:sp>
+      <p:sp>
+        <p:nvSpPr>
+          <p:cNvPr id="44" name="TextBox 43"/>
+          <p:cNvSpPr txBox="1"/>
+          <p:nvPr/>
+        </p:nvSpPr>
+        <p:spPr>
+          <a:xfrm>
+            <a:off x="365760" y="4572000"/>
+            <a:ext cx="2011680" cy="274320"/>
+          </a:xfrm>
+          <a:prstGeom prst="rect">
+            <a:avLst/>
+          </a:prstGeom>
+          <a:noFill/>
+        </p:spPr>
+        <p:txBody>
+          <a:bodyPr wrap="square" lIns="0" rIns="0" tIns="0" bIns="0">
+            <a:spAutoFit/>
+          </a:bodyPr>
+          <a:lstStyle/>
+          <a:p>
+            <a:pPr algn="ctr"/>
+            <a:r>
+              <a:rPr sz="1000" b="0" i="0">
+                <a:solidFill>
+                  <a:srgbClr val="8CAABF"/>
+                </a:solidFill>
+                <a:latin typeface="Calibri"/>
+              </a:rPr>
+              <a:t>labelled KOIs with views</a:t>
+            </a:r>
+          </a:p>
+        </p:txBody>
+      </p:sp>
+      <p:sp>
+        <p:nvSpPr>
+          <p:cNvPr id="45" name="TextBox 44"/>
+          <p:cNvSpPr txBox="1"/>
+          <p:nvPr/>
+        </p:nvSpPr>
+        <p:spPr>
+          <a:xfrm>
+            <a:off x="2514600" y="4041648"/>
+            <a:ext cx="2011680" cy="502920"/>
+          </a:xfrm>
+          <a:prstGeom prst="rect">
+            <a:avLst/>
+          </a:prstGeom>
+          <a:noFill/>
+        </p:spPr>
+        <p:txBody>
+          <a:bodyPr wrap="square" lIns="0" rIns="0" tIns="0" bIns="0">
+            <a:spAutoFit/>
+          </a:bodyPr>
+          <a:lstStyle/>
+          <a:p>
+            <a:pPr algn="ctr"/>
+            <a:r>
+              <a:rPr sz="2600" b="1" i="0">
+                <a:solidFill>
+                  <a:srgbClr val="0AADA4"/>
+                </a:solidFill>
+                <a:latin typeface="Calibri"/>
+              </a:rPr>
+              <a:t>6,640</a:t>
+            </a:r>
+          </a:p>
+        </p:txBody>
+      </p:sp>
+      <p:sp>
+        <p:nvSpPr>
+          <p:cNvPr id="46" name="TextBox 45"/>
+          <p:cNvSpPr txBox="1"/>
+          <p:nvPr/>
+        </p:nvSpPr>
+        <p:spPr>
+          <a:xfrm>
+            <a:off x="2514600" y="4572000"/>
+            <a:ext cx="2011680" cy="274320"/>
+          </a:xfrm>
+          <a:prstGeom prst="rect">
+            <a:avLst/>
+          </a:prstGeom>
+          <a:noFill/>
+        </p:spPr>
+        <p:txBody>
+          <a:bodyPr wrap="square" lIns="0" rIns="0" tIns="0" bIns="0">
+            <a:spAutoFit/>
+          </a:bodyPr>
+          <a:lstStyle/>
+          <a:p>
+            <a:pPr algn="ctr"/>
+            <a:r>
+              <a:rPr sz="1000" b="0" i="0">
+                <a:solidFill>
+                  <a:srgbClr val="8CAABF"/>
+                </a:solidFill>
+                <a:latin typeface="Calibri"/>
+              </a:rPr>
+              <a:t>stars, grouped splits</a:t>
+            </a:r>
+          </a:p>
+        </p:txBody>
+      </p:sp>
+      <p:sp>
+        <p:nvSpPr>
+          <p:cNvPr id="47" name="TextBox 46"/>
+          <p:cNvSpPr txBox="1"/>
+          <p:nvPr/>
+        </p:nvSpPr>
+        <p:spPr>
+          <a:xfrm>
+            <a:off x="4663440" y="4041648"/>
+            <a:ext cx="2011680" cy="502920"/>
+          </a:xfrm>
+          <a:prstGeom prst="rect">
+            <a:avLst/>
+          </a:prstGeom>
+          <a:noFill/>
+        </p:spPr>
+        <p:txBody>
+          <a:bodyPr wrap="square" lIns="0" rIns="0" tIns="0" bIns="0">
+            <a:spAutoFit/>
+          </a:bodyPr>
+          <a:lstStyle/>
+          <a:p>
+            <a:pPr algn="ctr"/>
+            <a:r>
+              <a:rPr sz="2600" b="1" i="0">
+                <a:solidFill>
+                  <a:srgbClr val="F5C518"/>
+                </a:solidFill>
+                <a:latin typeface="Calibri"/>
+              </a:rPr>
+              <a:t>97.2%</a:t>
+            </a:r>
+          </a:p>
+        </p:txBody>
+      </p:sp>
+      <p:sp>
+        <p:nvSpPr>
+          <p:cNvPr id="48" name="TextBox 47"/>
+          <p:cNvSpPr txBox="1"/>
+          <p:nvPr/>
+        </p:nvSpPr>
+        <p:spPr>
+          <a:xfrm>
+            <a:off x="4663440" y="4572000"/>
+            <a:ext cx="2011680" cy="274320"/>
+          </a:xfrm>
+          <a:prstGeom prst="rect">
+            <a:avLst/>
+          </a:prstGeom>
+          <a:noFill/>
+        </p:spPr>
+        <p:txBody>
+          <a:bodyPr wrap="square" lIns="0" rIns="0" tIns="0" bIns="0">
+            <a:spAutoFit/>
+          </a:bodyPr>
+          <a:lstStyle/>
+          <a:p>
+            <a:pPr algn="ctr"/>
+            <a:r>
+              <a:rPr sz="1000" b="0" i="0">
+                <a:solidFill>
+                  <a:srgbClr val="8CAABF"/>
+                </a:solidFill>
+                <a:latin typeface="Calibri"/>
+              </a:rPr>
+              <a:t>test accuracy (5-net ensemble)</a:t>
+            </a:r>
+          </a:p>
+        </p:txBody>
+      </p:sp>
+      <p:sp>
+        <p:nvSpPr>
+          <p:cNvPr id="49" name="TextBox 48"/>
+          <p:cNvSpPr txBox="1"/>
+          <p:nvPr/>
+        </p:nvSpPr>
+        <p:spPr>
+          <a:xfrm>
+            <a:off x="6812280" y="4041648"/>
+            <a:ext cx="2011680" cy="502920"/>
+          </a:xfrm>
+          <a:prstGeom prst="rect">
+            <a:avLst/>
+          </a:prstGeom>
+          <a:noFill/>
+        </p:spPr>
+        <p:txBody>
+          <a:bodyPr wrap="square" lIns="0" rIns="0" tIns="0" bIns="0">
+            <a:spAutoFit/>
+          </a:bodyPr>
+          <a:lstStyle/>
+          <a:p>
+            <a:pPr algn="ctr"/>
+            <a:r>
+              <a:rPr sz="2600" b="1" i="0">
+                <a:solidFill>
+                  <a:srgbClr val="F5C518"/>
+                </a:solidFill>
+                <a:latin typeface="Calibri"/>
+              </a:rPr>
+              <a:t>0.994</a:t>
+            </a:r>
+          </a:p>
+        </p:txBody>
+      </p:sp>
+      <p:sp>
+        <p:nvSpPr>
+          <p:cNvPr id="50" name="TextBox 49"/>
+          <p:cNvSpPr txBox="1"/>
+          <p:nvPr/>
+        </p:nvSpPr>
+        <p:spPr>
+          <a:xfrm>
+            <a:off x="6812280" y="4572000"/>
+            <a:ext cx="2011680" cy="274320"/>
+          </a:xfrm>
+          <a:prstGeom prst="rect">
+            <a:avLst/>
+          </a:prstGeom>
+          <a:noFill/>
+        </p:spPr>
+        <p:txBody>
+          <a:bodyPr wrap="square" lIns="0" rIns="0" tIns="0" bIns="0">
+            <a:spAutoFit/>
+          </a:bodyPr>
+          <a:lstStyle/>
+          <a:p>
+            <a:pPr algn="ctr"/>
+            <a:r>
+              <a:rPr sz="1000" b="0" i="0">
+                <a:solidFill>
+                  <a:srgbClr val="8CAABF"/>
+                </a:solidFill>
+                <a:latin typeface="Calibri"/>
+              </a:rPr>
+              <a:t>test AUC</a:t>
+            </a:r>
           </a:p>
         </p:txBody>
       </p:sp>
